--- a/lab-3/presentation/Presentation.pptx
+++ b/lab-3/presentation/Presentation.pptx
@@ -70,7 +70,7 @@
         <p:txBody>
           <a:bodyPr/>
           <a:p>
-            <a:fld id="{E22DF974-C987-42B6-8BB9-44A4A1AA66EA}" type="slidenum">
+            <a:fld id="{2F9119CF-CDB8-456A-B1C5-7DFD12960964}" type="slidenum">
               <a:t>&lt;#&gt;</a:t>
             </a:fld>
           </a:p>
@@ -264,7 +264,7 @@
         <p:txBody>
           <a:bodyPr/>
           <a:p>
-            <a:fld id="{492C307A-636B-40F3-ABDB-66624BD6D4CE}" type="slidenum">
+            <a:fld id="{902C258D-51CA-4BD4-BEEA-1987792BFDA8}" type="slidenum">
               <a:t>&lt;#&gt;</a:t>
             </a:fld>
           </a:p>
@@ -532,7 +532,7 @@
         <p:txBody>
           <a:bodyPr/>
           <a:p>
-            <a:fld id="{F9322B18-F84A-4C92-8B06-C55F11F9665B}" type="slidenum">
+            <a:fld id="{52B208C2-D4ED-4B9D-A165-14B3CAE34DC4}" type="slidenum">
               <a:t>&lt;#&gt;</a:t>
             </a:fld>
           </a:p>
@@ -874,7 +874,7 @@
         <p:txBody>
           <a:bodyPr/>
           <a:p>
-            <a:fld id="{D0AA5E64-BA7E-4693-80EB-CF99CC99429C}" type="slidenum">
+            <a:fld id="{7C179A4E-EAF8-41E6-8957-3FD5F00C7B6F}" type="slidenum">
               <a:t>&lt;#&gt;</a:t>
             </a:fld>
           </a:p>
@@ -1031,7 +1031,7 @@
         <p:txBody>
           <a:bodyPr/>
           <a:p>
-            <a:fld id="{347C6426-7A7D-4E76-B207-C14633619BC1}" type="slidenum">
+            <a:fld id="{FD7060B3-95AA-402E-A22F-68A2F3034648}" type="slidenum">
               <a:t>&lt;#&gt;</a:t>
             </a:fld>
           </a:p>
@@ -1188,7 +1188,7 @@
         <p:txBody>
           <a:bodyPr/>
           <a:p>
-            <a:fld id="{8549F166-613E-43F9-B082-8A445F0A90F0}" type="slidenum">
+            <a:fld id="{9D0D47AC-9A3A-4140-BFFE-134447CE3DAF}" type="slidenum">
               <a:t>&lt;#&gt;</a:t>
             </a:fld>
           </a:p>
@@ -1382,7 +1382,7 @@
         <p:txBody>
           <a:bodyPr/>
           <a:p>
-            <a:fld id="{25D3619F-00DB-4383-A1AF-E4D4EC5C2B54}" type="slidenum">
+            <a:fld id="{E53DD232-69BE-4291-A4B9-EF8C24B7423C}" type="slidenum">
               <a:t>&lt;#&gt;</a:t>
             </a:fld>
           </a:p>
@@ -1502,7 +1502,7 @@
         <p:txBody>
           <a:bodyPr/>
           <a:p>
-            <a:fld id="{5C8E2717-6376-4281-B62D-C8C64E03F5AD}" type="slidenum">
+            <a:fld id="{DE1C5A64-522F-4D9D-BCD6-0CABE0EF4B67}" type="slidenum">
               <a:t>&lt;#&gt;</a:t>
             </a:fld>
           </a:p>
@@ -1622,7 +1622,7 @@
         <p:txBody>
           <a:bodyPr/>
           <a:p>
-            <a:fld id="{E101A1C9-1272-43DB-8ABE-BEB0EA72612E}" type="slidenum">
+            <a:fld id="{752DF8BE-58F4-461C-8C56-05A77AA135A8}" type="slidenum">
               <a:t>&lt;#&gt;</a:t>
             </a:fld>
           </a:p>
@@ -1853,7 +1853,7 @@
         <p:txBody>
           <a:bodyPr/>
           <a:p>
-            <a:fld id="{926B0EF1-E3BA-4634-8A0F-021095854889}" type="slidenum">
+            <a:fld id="{55C72F0E-07F0-41A4-9B78-09AD6529EB05}" type="slidenum">
               <a:t>&lt;#&gt;</a:t>
             </a:fld>
           </a:p>
@@ -2084,7 +2084,7 @@
         <p:txBody>
           <a:bodyPr/>
           <a:p>
-            <a:fld id="{AAEA8E4F-BD7B-40BE-8A6F-B9921C1FEB64}" type="slidenum">
+            <a:fld id="{C45ED5E3-C7E3-4A97-B63B-1804954F2992}" type="slidenum">
               <a:t>&lt;#&gt;</a:t>
             </a:fld>
           </a:p>
@@ -2315,7 +2315,7 @@
         <p:txBody>
           <a:bodyPr/>
           <a:p>
-            <a:fld id="{65D04C7C-7C54-4D54-B0C0-AFE5CC181DD4}" type="slidenum">
+            <a:fld id="{36368C19-59C8-4645-AC8D-33588A7F2464}" type="slidenum">
               <a:t>&lt;#&gt;</a:t>
             </a:fld>
           </a:p>
@@ -2533,7 +2533,7 @@
               </a:lnSpc>
               <a:buNone/>
             </a:pPr>
-            <a:fld id="{F6A90E77-37E2-427D-A2D8-960443161128}" type="slidenum">
+            <a:fld id="{012CC8C1-5235-429D-A490-4A075B1CCB25}" type="slidenum">
               <a:rPr b="0" lang="en-US" sz="1200" spc="-1" strike="noStrike">
                 <a:solidFill>
                   <a:srgbClr val="8b8b8b"/>
@@ -3171,7 +3171,7 @@
         </p:nvSpPr>
         <p:spPr>
           <a:xfrm>
-            <a:off x="457200" y="1325880"/>
+            <a:off x="228600" y="1325880"/>
             <a:ext cx="5486400" cy="3033720"/>
           </a:xfrm>
           <a:prstGeom prst="rect">
@@ -3648,8 +3648,8 @@
         </p:nvSpPr>
         <p:spPr>
           <a:xfrm>
-            <a:off x="-901440" y="5989320"/>
-            <a:ext cx="14055840" cy="302760"/>
+            <a:off x="2184840" y="5989320"/>
+            <a:ext cx="7883280" cy="515880"/>
           </a:xfrm>
           <a:prstGeom prst="rect">
             <a:avLst/>
@@ -3683,7 +3683,36 @@
                 </a:solidFill>
                 <a:latin typeface="Calibri"/>
               </a:rPr>
-              <a:t>В среднем выше всего оценивается Самокат, но структура оценок неоднородна: скорость и цена работают как разные источники предпочтения.</a:t>
+              <a:t>В среднем выше всего оценивается Самокат, но структура оценок неоднородна:</a:t>
+            </a:r>
+            <a:endParaRPr b="0" lang="en-US" sz="1400" spc="-1" strike="noStrike">
+              <a:latin typeface="Arial"/>
+            </a:endParaRPr>
+          </a:p>
+          <a:p>
+            <a:pPr>
+              <a:lnSpc>
+                <a:spcPct val="100000"/>
+              </a:lnSpc>
+              <a:buNone/>
+            </a:pPr>
+            <a:r>
+              <a:rPr b="0" lang="en-US" sz="1400" spc="-1" strike="noStrike">
+                <a:solidFill>
+                  <a:srgbClr val="323c46"/>
+                </a:solidFill>
+                <a:latin typeface="Calibri"/>
+              </a:rPr>
+              <a:t> </a:t>
+            </a:r>
+            <a:r>
+              <a:rPr b="0" lang="en-US" sz="1400" spc="-1" strike="noStrike">
+                <a:solidFill>
+                  <a:srgbClr val="323c46"/>
+                </a:solidFill>
+                <a:latin typeface="Calibri"/>
+              </a:rPr>
+              <a:t>скорость и цена работают как разные источники предпочтения.</a:t>
             </a:r>
             <a:endParaRPr b="0" lang="en-US" sz="1400" spc="-1" strike="noStrike">
               <a:latin typeface="Arial"/>

--- a/lab-3/presentation/Presentation.pptx
+++ b/lab-3/presentation/Presentation.pptx
@@ -62,7 +62,7 @@
       </p:grpSpPr>
       <p:sp>
         <p:nvSpPr>
-          <p:cNvPr id="26" name="PlaceHolder 1"/>
+          <p:cNvPr id="25" name="PlaceHolder 1"/>
           <p:cNvSpPr>
             <a:spLocks noGrp="1"/>
           </p:cNvSpPr>
@@ -72,8 +72,8 @@
         </p:nvSpPr>
         <p:spPr>
           <a:xfrm>
-            <a:off x="550800" y="2509560"/>
-            <a:ext cx="8051400" cy="1325160"/>
+            <a:off x="609480" y="273600"/>
+            <a:ext cx="10972440" cy="1144800"/>
           </a:xfrm>
           <a:prstGeom prst="rect">
             <a:avLst/>
@@ -88,18 +88,18 @@
             <a:noAutofit/>
           </a:bodyPr>
           <a:p>
-            <a:endParaRPr b="0" lang="ru-RU" sz="1800" spc="-1" strike="noStrike">
-              <a:solidFill>
-                <a:srgbClr val="242834"/>
-              </a:solidFill>
-              <a:latin typeface="Arial"/>
-            </a:endParaRPr>
-          </a:p>
-        </p:txBody>
-      </p:sp>
-      <p:sp>
-        <p:nvSpPr>
-          <p:cNvPr id="27" name="PlaceHolder 2"/>
+            <a:pPr algn="ctr">
+              <a:buNone/>
+            </a:pPr>
+            <a:endParaRPr b="0" lang="en-US" sz="4400" spc="-1" strike="noStrike">
+              <a:latin typeface="Arial"/>
+            </a:endParaRPr>
+          </a:p>
+        </p:txBody>
+      </p:sp>
+      <p:sp>
+        <p:nvSpPr>
+          <p:cNvPr id="26" name="PlaceHolder 2"/>
           <p:cNvSpPr>
             <a:spLocks noGrp="1"/>
           </p:cNvSpPr>
@@ -109,8 +109,8 @@
         </p:nvSpPr>
         <p:spPr>
           <a:xfrm>
-            <a:off x="550800" y="4568400"/>
-            <a:ext cx="6330600" cy="401040"/>
+            <a:off x="609480" y="1604520"/>
+            <a:ext cx="10972440" cy="1896840"/>
           </a:xfrm>
           <a:prstGeom prst="rect">
             <a:avLst/>
@@ -125,18 +125,15 @@
             <a:normAutofit/>
           </a:bodyPr>
           <a:p>
-            <a:endParaRPr b="0" lang="ru-RU" sz="1800" spc="-1" strike="noStrike">
-              <a:solidFill>
-                <a:srgbClr val="242834"/>
-              </a:solidFill>
-              <a:latin typeface="Arial"/>
-            </a:endParaRPr>
-          </a:p>
-        </p:txBody>
-      </p:sp>
-      <p:sp>
-        <p:nvSpPr>
-          <p:cNvPr id="28" name="PlaceHolder 3"/>
+            <a:endParaRPr b="0" lang="en-US" sz="3200" spc="-1" strike="noStrike">
+              <a:latin typeface="Arial"/>
+            </a:endParaRPr>
+          </a:p>
+        </p:txBody>
+      </p:sp>
+      <p:sp>
+        <p:nvSpPr>
+          <p:cNvPr id="27" name="PlaceHolder 3"/>
           <p:cNvSpPr>
             <a:spLocks noGrp="1"/>
           </p:cNvSpPr>
@@ -146,8 +143,8 @@
         </p:nvSpPr>
         <p:spPr>
           <a:xfrm>
-            <a:off x="550800" y="5007960"/>
-            <a:ext cx="6330600" cy="401040"/>
+            <a:off x="609480" y="3682080"/>
+            <a:ext cx="10972440" cy="1896840"/>
           </a:xfrm>
           <a:prstGeom prst="rect">
             <a:avLst/>
@@ -162,10 +159,7 @@
             <a:normAutofit/>
           </a:bodyPr>
           <a:p>
-            <a:endParaRPr b="0" lang="ru-RU" sz="1800" spc="-1" strike="noStrike">
-              <a:solidFill>
-                <a:srgbClr val="242834"/>
-              </a:solidFill>
+            <a:endParaRPr b="0" lang="en-US" sz="3200" spc="-1" strike="noStrike">
               <a:latin typeface="Arial"/>
             </a:endParaRPr>
           </a:p>
@@ -195,7 +189,7 @@
       </p:grpSpPr>
       <p:sp>
         <p:nvSpPr>
-          <p:cNvPr id="29" name="PlaceHolder 1"/>
+          <p:cNvPr id="28" name="PlaceHolder 1"/>
           <p:cNvSpPr>
             <a:spLocks noGrp="1"/>
           </p:cNvSpPr>
@@ -205,8 +199,8 @@
         </p:nvSpPr>
         <p:spPr>
           <a:xfrm>
-            <a:off x="550800" y="2509560"/>
-            <a:ext cx="8051400" cy="1325160"/>
+            <a:off x="609480" y="273600"/>
+            <a:ext cx="10972440" cy="1144800"/>
           </a:xfrm>
           <a:prstGeom prst="rect">
             <a:avLst/>
@@ -221,18 +215,18 @@
             <a:noAutofit/>
           </a:bodyPr>
           <a:p>
-            <a:endParaRPr b="0" lang="ru-RU" sz="1800" spc="-1" strike="noStrike">
-              <a:solidFill>
-                <a:srgbClr val="242834"/>
-              </a:solidFill>
-              <a:latin typeface="Arial"/>
-            </a:endParaRPr>
-          </a:p>
-        </p:txBody>
-      </p:sp>
-      <p:sp>
-        <p:nvSpPr>
-          <p:cNvPr id="30" name="PlaceHolder 2"/>
+            <a:pPr algn="ctr">
+              <a:buNone/>
+            </a:pPr>
+            <a:endParaRPr b="0" lang="en-US" sz="4400" spc="-1" strike="noStrike">
+              <a:latin typeface="Arial"/>
+            </a:endParaRPr>
+          </a:p>
+        </p:txBody>
+      </p:sp>
+      <p:sp>
+        <p:nvSpPr>
+          <p:cNvPr id="29" name="PlaceHolder 2"/>
           <p:cNvSpPr>
             <a:spLocks noGrp="1"/>
           </p:cNvSpPr>
@@ -242,8 +236,8 @@
         </p:nvSpPr>
         <p:spPr>
           <a:xfrm>
-            <a:off x="550800" y="4568400"/>
-            <a:ext cx="3089160" cy="401040"/>
+            <a:off x="609480" y="1604520"/>
+            <a:ext cx="5354280" cy="1896840"/>
           </a:xfrm>
           <a:prstGeom prst="rect">
             <a:avLst/>
@@ -258,18 +252,15 @@
             <a:normAutofit/>
           </a:bodyPr>
           <a:p>
-            <a:endParaRPr b="0" lang="ru-RU" sz="1800" spc="-1" strike="noStrike">
-              <a:solidFill>
-                <a:srgbClr val="242834"/>
-              </a:solidFill>
-              <a:latin typeface="Arial"/>
-            </a:endParaRPr>
-          </a:p>
-        </p:txBody>
-      </p:sp>
-      <p:sp>
-        <p:nvSpPr>
-          <p:cNvPr id="31" name="PlaceHolder 3"/>
+            <a:endParaRPr b="0" lang="en-US" sz="3200" spc="-1" strike="noStrike">
+              <a:latin typeface="Arial"/>
+            </a:endParaRPr>
+          </a:p>
+        </p:txBody>
+      </p:sp>
+      <p:sp>
+        <p:nvSpPr>
+          <p:cNvPr id="30" name="PlaceHolder 3"/>
           <p:cNvSpPr>
             <a:spLocks noGrp="1"/>
           </p:cNvSpPr>
@@ -279,8 +270,8 @@
         </p:nvSpPr>
         <p:spPr>
           <a:xfrm>
-            <a:off x="3794760" y="4568400"/>
-            <a:ext cx="3089160" cy="401040"/>
+            <a:off x="6231960" y="1604520"/>
+            <a:ext cx="5354280" cy="1896840"/>
           </a:xfrm>
           <a:prstGeom prst="rect">
             <a:avLst/>
@@ -295,18 +286,15 @@
             <a:normAutofit/>
           </a:bodyPr>
           <a:p>
-            <a:endParaRPr b="0" lang="ru-RU" sz="1800" spc="-1" strike="noStrike">
-              <a:solidFill>
-                <a:srgbClr val="242834"/>
-              </a:solidFill>
-              <a:latin typeface="Arial"/>
-            </a:endParaRPr>
-          </a:p>
-        </p:txBody>
-      </p:sp>
-      <p:sp>
-        <p:nvSpPr>
-          <p:cNvPr id="32" name="PlaceHolder 4"/>
+            <a:endParaRPr b="0" lang="en-US" sz="3200" spc="-1" strike="noStrike">
+              <a:latin typeface="Arial"/>
+            </a:endParaRPr>
+          </a:p>
+        </p:txBody>
+      </p:sp>
+      <p:sp>
+        <p:nvSpPr>
+          <p:cNvPr id="31" name="PlaceHolder 4"/>
           <p:cNvSpPr>
             <a:spLocks noGrp="1"/>
           </p:cNvSpPr>
@@ -316,8 +304,8 @@
         </p:nvSpPr>
         <p:spPr>
           <a:xfrm>
-            <a:off x="550800" y="5007960"/>
-            <a:ext cx="3089160" cy="401040"/>
+            <a:off x="609480" y="3682080"/>
+            <a:ext cx="5354280" cy="1896840"/>
           </a:xfrm>
           <a:prstGeom prst="rect">
             <a:avLst/>
@@ -332,18 +320,15 @@
             <a:normAutofit/>
           </a:bodyPr>
           <a:p>
-            <a:endParaRPr b="0" lang="ru-RU" sz="1800" spc="-1" strike="noStrike">
-              <a:solidFill>
-                <a:srgbClr val="242834"/>
-              </a:solidFill>
-              <a:latin typeface="Arial"/>
-            </a:endParaRPr>
-          </a:p>
-        </p:txBody>
-      </p:sp>
-      <p:sp>
-        <p:nvSpPr>
-          <p:cNvPr id="33" name="PlaceHolder 5"/>
+            <a:endParaRPr b="0" lang="en-US" sz="3200" spc="-1" strike="noStrike">
+              <a:latin typeface="Arial"/>
+            </a:endParaRPr>
+          </a:p>
+        </p:txBody>
+      </p:sp>
+      <p:sp>
+        <p:nvSpPr>
+          <p:cNvPr id="32" name="PlaceHolder 5"/>
           <p:cNvSpPr>
             <a:spLocks noGrp="1"/>
           </p:cNvSpPr>
@@ -353,8 +338,8 @@
         </p:nvSpPr>
         <p:spPr>
           <a:xfrm>
-            <a:off x="3794760" y="5007960"/>
-            <a:ext cx="3089160" cy="401040"/>
+            <a:off x="6231960" y="3682080"/>
+            <a:ext cx="5354280" cy="1896840"/>
           </a:xfrm>
           <a:prstGeom prst="rect">
             <a:avLst/>
@@ -369,10 +354,7 @@
             <a:normAutofit/>
           </a:bodyPr>
           <a:p>
-            <a:endParaRPr b="0" lang="ru-RU" sz="1800" spc="-1" strike="noStrike">
-              <a:solidFill>
-                <a:srgbClr val="242834"/>
-              </a:solidFill>
+            <a:endParaRPr b="0" lang="en-US" sz="3200" spc="-1" strike="noStrike">
               <a:latin typeface="Arial"/>
             </a:endParaRPr>
           </a:p>
@@ -402,7 +384,7 @@
       </p:grpSpPr>
       <p:sp>
         <p:nvSpPr>
-          <p:cNvPr id="34" name="PlaceHolder 1"/>
+          <p:cNvPr id="33" name="PlaceHolder 1"/>
           <p:cNvSpPr>
             <a:spLocks noGrp="1"/>
           </p:cNvSpPr>
@@ -412,8 +394,8 @@
         </p:nvSpPr>
         <p:spPr>
           <a:xfrm>
-            <a:off x="550800" y="2509560"/>
-            <a:ext cx="8051400" cy="1325160"/>
+            <a:off x="609480" y="273600"/>
+            <a:ext cx="10972440" cy="1144800"/>
           </a:xfrm>
           <a:prstGeom prst="rect">
             <a:avLst/>
@@ -428,18 +410,18 @@
             <a:noAutofit/>
           </a:bodyPr>
           <a:p>
-            <a:endParaRPr b="0" lang="ru-RU" sz="1800" spc="-1" strike="noStrike">
-              <a:solidFill>
-                <a:srgbClr val="242834"/>
-              </a:solidFill>
-              <a:latin typeface="Arial"/>
-            </a:endParaRPr>
-          </a:p>
-        </p:txBody>
-      </p:sp>
-      <p:sp>
-        <p:nvSpPr>
-          <p:cNvPr id="35" name="PlaceHolder 2"/>
+            <a:pPr algn="ctr">
+              <a:buNone/>
+            </a:pPr>
+            <a:endParaRPr b="0" lang="en-US" sz="4400" spc="-1" strike="noStrike">
+              <a:latin typeface="Arial"/>
+            </a:endParaRPr>
+          </a:p>
+        </p:txBody>
+      </p:sp>
+      <p:sp>
+        <p:nvSpPr>
+          <p:cNvPr id="34" name="PlaceHolder 2"/>
           <p:cNvSpPr>
             <a:spLocks noGrp="1"/>
           </p:cNvSpPr>
@@ -449,8 +431,8 @@
         </p:nvSpPr>
         <p:spPr>
           <a:xfrm>
-            <a:off x="550800" y="4568400"/>
-            <a:ext cx="2038320" cy="401040"/>
+            <a:off x="609480" y="1604520"/>
+            <a:ext cx="3533040" cy="1896840"/>
           </a:xfrm>
           <a:prstGeom prst="rect">
             <a:avLst/>
@@ -462,21 +444,18 @@
         </p:spPr>
         <p:txBody>
           <a:bodyPr lIns="0" rIns="0" tIns="0" bIns="0" anchor="t">
-            <a:normAutofit fontScale="88000"/>
-          </a:bodyPr>
-          <a:p>
-            <a:endParaRPr b="0" lang="ru-RU" sz="1800" spc="-1" strike="noStrike">
-              <a:solidFill>
-                <a:srgbClr val="242834"/>
-              </a:solidFill>
-              <a:latin typeface="Arial"/>
-            </a:endParaRPr>
-          </a:p>
-        </p:txBody>
-      </p:sp>
-      <p:sp>
-        <p:nvSpPr>
-          <p:cNvPr id="36" name="PlaceHolder 3"/>
+            <a:normAutofit/>
+          </a:bodyPr>
+          <a:p>
+            <a:endParaRPr b="0" lang="en-US" sz="3200" spc="-1" strike="noStrike">
+              <a:latin typeface="Arial"/>
+            </a:endParaRPr>
+          </a:p>
+        </p:txBody>
+      </p:sp>
+      <p:sp>
+        <p:nvSpPr>
+          <p:cNvPr id="35" name="PlaceHolder 3"/>
           <p:cNvSpPr>
             <a:spLocks noGrp="1"/>
           </p:cNvSpPr>
@@ -486,8 +465,8 @@
         </p:nvSpPr>
         <p:spPr>
           <a:xfrm>
-            <a:off x="2691360" y="4568400"/>
-            <a:ext cx="2038320" cy="401040"/>
+            <a:off x="4319640" y="1604520"/>
+            <a:ext cx="3533040" cy="1896840"/>
           </a:xfrm>
           <a:prstGeom prst="rect">
             <a:avLst/>
@@ -499,21 +478,18 @@
         </p:spPr>
         <p:txBody>
           <a:bodyPr lIns="0" rIns="0" tIns="0" bIns="0" anchor="t">
-            <a:normAutofit fontScale="88000"/>
-          </a:bodyPr>
-          <a:p>
-            <a:endParaRPr b="0" lang="ru-RU" sz="1800" spc="-1" strike="noStrike">
-              <a:solidFill>
-                <a:srgbClr val="242834"/>
-              </a:solidFill>
-              <a:latin typeface="Arial"/>
-            </a:endParaRPr>
-          </a:p>
-        </p:txBody>
-      </p:sp>
-      <p:sp>
-        <p:nvSpPr>
-          <p:cNvPr id="37" name="PlaceHolder 4"/>
+            <a:normAutofit/>
+          </a:bodyPr>
+          <a:p>
+            <a:endParaRPr b="0" lang="en-US" sz="3200" spc="-1" strike="noStrike">
+              <a:latin typeface="Arial"/>
+            </a:endParaRPr>
+          </a:p>
+        </p:txBody>
+      </p:sp>
+      <p:sp>
+        <p:nvSpPr>
+          <p:cNvPr id="36" name="PlaceHolder 4"/>
           <p:cNvSpPr>
             <a:spLocks noGrp="1"/>
           </p:cNvSpPr>
@@ -523,8 +499,8 @@
         </p:nvSpPr>
         <p:spPr>
           <a:xfrm>
-            <a:off x="4831920" y="4568400"/>
-            <a:ext cx="2038320" cy="401040"/>
+            <a:off x="8029800" y="1604520"/>
+            <a:ext cx="3533040" cy="1896840"/>
           </a:xfrm>
           <a:prstGeom prst="rect">
             <a:avLst/>
@@ -536,21 +512,18 @@
         </p:spPr>
         <p:txBody>
           <a:bodyPr lIns="0" rIns="0" tIns="0" bIns="0" anchor="t">
-            <a:normAutofit fontScale="88000"/>
-          </a:bodyPr>
-          <a:p>
-            <a:endParaRPr b="0" lang="ru-RU" sz="1800" spc="-1" strike="noStrike">
-              <a:solidFill>
-                <a:srgbClr val="242834"/>
-              </a:solidFill>
-              <a:latin typeface="Arial"/>
-            </a:endParaRPr>
-          </a:p>
-        </p:txBody>
-      </p:sp>
-      <p:sp>
-        <p:nvSpPr>
-          <p:cNvPr id="38" name="PlaceHolder 5"/>
+            <a:normAutofit/>
+          </a:bodyPr>
+          <a:p>
+            <a:endParaRPr b="0" lang="en-US" sz="3200" spc="-1" strike="noStrike">
+              <a:latin typeface="Arial"/>
+            </a:endParaRPr>
+          </a:p>
+        </p:txBody>
+      </p:sp>
+      <p:sp>
+        <p:nvSpPr>
+          <p:cNvPr id="37" name="PlaceHolder 5"/>
           <p:cNvSpPr>
             <a:spLocks noGrp="1"/>
           </p:cNvSpPr>
@@ -560,8 +533,8 @@
         </p:nvSpPr>
         <p:spPr>
           <a:xfrm>
-            <a:off x="550800" y="5007960"/>
-            <a:ext cx="2038320" cy="401040"/>
+            <a:off x="609480" y="3682080"/>
+            <a:ext cx="3533040" cy="1896840"/>
           </a:xfrm>
           <a:prstGeom prst="rect">
             <a:avLst/>
@@ -573,21 +546,18 @@
         </p:spPr>
         <p:txBody>
           <a:bodyPr lIns="0" rIns="0" tIns="0" bIns="0" anchor="t">
-            <a:normAutofit fontScale="88000"/>
-          </a:bodyPr>
-          <a:p>
-            <a:endParaRPr b="0" lang="ru-RU" sz="1800" spc="-1" strike="noStrike">
-              <a:solidFill>
-                <a:srgbClr val="242834"/>
-              </a:solidFill>
-              <a:latin typeface="Arial"/>
-            </a:endParaRPr>
-          </a:p>
-        </p:txBody>
-      </p:sp>
-      <p:sp>
-        <p:nvSpPr>
-          <p:cNvPr id="39" name="PlaceHolder 6"/>
+            <a:normAutofit/>
+          </a:bodyPr>
+          <a:p>
+            <a:endParaRPr b="0" lang="en-US" sz="3200" spc="-1" strike="noStrike">
+              <a:latin typeface="Arial"/>
+            </a:endParaRPr>
+          </a:p>
+        </p:txBody>
+      </p:sp>
+      <p:sp>
+        <p:nvSpPr>
+          <p:cNvPr id="38" name="PlaceHolder 6"/>
           <p:cNvSpPr>
             <a:spLocks noGrp="1"/>
           </p:cNvSpPr>
@@ -597,8 +567,8 @@
         </p:nvSpPr>
         <p:spPr>
           <a:xfrm>
-            <a:off x="2691360" y="5007960"/>
-            <a:ext cx="2038320" cy="401040"/>
+            <a:off x="4319640" y="3682080"/>
+            <a:ext cx="3533040" cy="1896840"/>
           </a:xfrm>
           <a:prstGeom prst="rect">
             <a:avLst/>
@@ -610,21 +580,18 @@
         </p:spPr>
         <p:txBody>
           <a:bodyPr lIns="0" rIns="0" tIns="0" bIns="0" anchor="t">
-            <a:normAutofit fontScale="88000"/>
-          </a:bodyPr>
-          <a:p>
-            <a:endParaRPr b="0" lang="ru-RU" sz="1800" spc="-1" strike="noStrike">
-              <a:solidFill>
-                <a:srgbClr val="242834"/>
-              </a:solidFill>
-              <a:latin typeface="Arial"/>
-            </a:endParaRPr>
-          </a:p>
-        </p:txBody>
-      </p:sp>
-      <p:sp>
-        <p:nvSpPr>
-          <p:cNvPr id="40" name="PlaceHolder 7"/>
+            <a:normAutofit/>
+          </a:bodyPr>
+          <a:p>
+            <a:endParaRPr b="0" lang="en-US" sz="3200" spc="-1" strike="noStrike">
+              <a:latin typeface="Arial"/>
+            </a:endParaRPr>
+          </a:p>
+        </p:txBody>
+      </p:sp>
+      <p:sp>
+        <p:nvSpPr>
+          <p:cNvPr id="39" name="PlaceHolder 7"/>
           <p:cNvSpPr>
             <a:spLocks noGrp="1"/>
           </p:cNvSpPr>
@@ -634,8 +601,8 @@
         </p:nvSpPr>
         <p:spPr>
           <a:xfrm>
-            <a:off x="4831920" y="5007960"/>
-            <a:ext cx="2038320" cy="401040"/>
+            <a:off x="8029800" y="3682080"/>
+            <a:ext cx="3533040" cy="1896840"/>
           </a:xfrm>
           <a:prstGeom prst="rect">
             <a:avLst/>
@@ -647,13 +614,10 @@
         </p:spPr>
         <p:txBody>
           <a:bodyPr lIns="0" rIns="0" tIns="0" bIns="0" anchor="t">
-            <a:normAutofit fontScale="88000"/>
-          </a:bodyPr>
-          <a:p>
-            <a:endParaRPr b="0" lang="ru-RU" sz="1800" spc="-1" strike="noStrike">
-              <a:solidFill>
-                <a:srgbClr val="242834"/>
-              </a:solidFill>
+            <a:normAutofit/>
+          </a:bodyPr>
+          <a:p>
+            <a:endParaRPr b="0" lang="en-US" sz="3200" spc="-1" strike="noStrike">
               <a:latin typeface="Arial"/>
             </a:endParaRPr>
           </a:p>
@@ -683,7 +647,7 @@
       </p:grpSpPr>
       <p:sp>
         <p:nvSpPr>
-          <p:cNvPr id="5" name="PlaceHolder 1"/>
+          <p:cNvPr id="4" name="PlaceHolder 1"/>
           <p:cNvSpPr>
             <a:spLocks noGrp="1"/>
           </p:cNvSpPr>
@@ -693,8 +657,8 @@
         </p:nvSpPr>
         <p:spPr>
           <a:xfrm>
-            <a:off x="550800" y="2509560"/>
-            <a:ext cx="8051400" cy="1325160"/>
+            <a:off x="609480" y="273600"/>
+            <a:ext cx="10972440" cy="1144800"/>
           </a:xfrm>
           <a:prstGeom prst="rect">
             <a:avLst/>
@@ -709,18 +673,18 @@
             <a:noAutofit/>
           </a:bodyPr>
           <a:p>
-            <a:endParaRPr b="0" lang="ru-RU" sz="1800" spc="-1" strike="noStrike">
-              <a:solidFill>
-                <a:srgbClr val="242834"/>
-              </a:solidFill>
-              <a:latin typeface="Arial"/>
-            </a:endParaRPr>
-          </a:p>
-        </p:txBody>
-      </p:sp>
-      <p:sp>
-        <p:nvSpPr>
-          <p:cNvPr id="6" name="PlaceHolder 2"/>
+            <a:pPr algn="ctr">
+              <a:buNone/>
+            </a:pPr>
+            <a:endParaRPr b="0" lang="en-US" sz="4400" spc="-1" strike="noStrike">
+              <a:latin typeface="Arial"/>
+            </a:endParaRPr>
+          </a:p>
+        </p:txBody>
+      </p:sp>
+      <p:sp>
+        <p:nvSpPr>
+          <p:cNvPr id="5" name="PlaceHolder 2"/>
           <p:cNvSpPr>
             <a:spLocks noGrp="1"/>
           </p:cNvSpPr>
@@ -730,8 +694,8 @@
         </p:nvSpPr>
         <p:spPr>
           <a:xfrm>
-            <a:off x="550800" y="4568400"/>
-            <a:ext cx="6330600" cy="840960"/>
+            <a:off x="609480" y="1604520"/>
+            <a:ext cx="10972440" cy="3977280"/>
           </a:xfrm>
           <a:prstGeom prst="rect">
             <a:avLst/>
@@ -779,7 +743,7 @@
       </p:grpSpPr>
       <p:sp>
         <p:nvSpPr>
-          <p:cNvPr id="7" name="PlaceHolder 1"/>
+          <p:cNvPr id="6" name="PlaceHolder 1"/>
           <p:cNvSpPr>
             <a:spLocks noGrp="1"/>
           </p:cNvSpPr>
@@ -789,8 +753,8 @@
         </p:nvSpPr>
         <p:spPr>
           <a:xfrm>
-            <a:off x="550800" y="2509560"/>
-            <a:ext cx="8051400" cy="1325160"/>
+            <a:off x="609480" y="273600"/>
+            <a:ext cx="10972440" cy="1144800"/>
           </a:xfrm>
           <a:prstGeom prst="rect">
             <a:avLst/>
@@ -805,18 +769,18 @@
             <a:noAutofit/>
           </a:bodyPr>
           <a:p>
-            <a:endParaRPr b="0" lang="ru-RU" sz="1800" spc="-1" strike="noStrike">
-              <a:solidFill>
-                <a:srgbClr val="242834"/>
-              </a:solidFill>
-              <a:latin typeface="Arial"/>
-            </a:endParaRPr>
-          </a:p>
-        </p:txBody>
-      </p:sp>
-      <p:sp>
-        <p:nvSpPr>
-          <p:cNvPr id="8" name="PlaceHolder 2"/>
+            <a:pPr algn="ctr">
+              <a:buNone/>
+            </a:pPr>
+            <a:endParaRPr b="0" lang="en-US" sz="4400" spc="-1" strike="noStrike">
+              <a:latin typeface="Arial"/>
+            </a:endParaRPr>
+          </a:p>
+        </p:txBody>
+      </p:sp>
+      <p:sp>
+        <p:nvSpPr>
+          <p:cNvPr id="7" name="PlaceHolder 2"/>
           <p:cNvSpPr>
             <a:spLocks noGrp="1"/>
           </p:cNvSpPr>
@@ -826,8 +790,8 @@
         </p:nvSpPr>
         <p:spPr>
           <a:xfrm>
-            <a:off x="550800" y="4568400"/>
-            <a:ext cx="6330600" cy="840960"/>
+            <a:off x="609480" y="1604520"/>
+            <a:ext cx="10972440" cy="3977280"/>
           </a:xfrm>
           <a:prstGeom prst="rect">
             <a:avLst/>
@@ -842,10 +806,7 @@
             <a:normAutofit/>
           </a:bodyPr>
           <a:p>
-            <a:endParaRPr b="0" lang="ru-RU" sz="1800" spc="-1" strike="noStrike">
-              <a:solidFill>
-                <a:srgbClr val="242834"/>
-              </a:solidFill>
+            <a:endParaRPr b="0" lang="en-US" sz="3200" spc="-1" strike="noStrike">
               <a:latin typeface="Arial"/>
             </a:endParaRPr>
           </a:p>
@@ -875,7 +836,7 @@
       </p:grpSpPr>
       <p:sp>
         <p:nvSpPr>
-          <p:cNvPr id="9" name="PlaceHolder 1"/>
+          <p:cNvPr id="8" name="PlaceHolder 1"/>
           <p:cNvSpPr>
             <a:spLocks noGrp="1"/>
           </p:cNvSpPr>
@@ -885,8 +846,8 @@
         </p:nvSpPr>
         <p:spPr>
           <a:xfrm>
-            <a:off x="550800" y="2509560"/>
-            <a:ext cx="8051400" cy="1325160"/>
+            <a:off x="609480" y="273600"/>
+            <a:ext cx="10972440" cy="1144800"/>
           </a:xfrm>
           <a:prstGeom prst="rect">
             <a:avLst/>
@@ -901,18 +862,18 @@
             <a:noAutofit/>
           </a:bodyPr>
           <a:p>
-            <a:endParaRPr b="0" lang="ru-RU" sz="1800" spc="-1" strike="noStrike">
-              <a:solidFill>
-                <a:srgbClr val="242834"/>
-              </a:solidFill>
-              <a:latin typeface="Arial"/>
-            </a:endParaRPr>
-          </a:p>
-        </p:txBody>
-      </p:sp>
-      <p:sp>
-        <p:nvSpPr>
-          <p:cNvPr id="10" name="PlaceHolder 2"/>
+            <a:pPr algn="ctr">
+              <a:buNone/>
+            </a:pPr>
+            <a:endParaRPr b="0" lang="en-US" sz="4400" spc="-1" strike="noStrike">
+              <a:latin typeface="Arial"/>
+            </a:endParaRPr>
+          </a:p>
+        </p:txBody>
+      </p:sp>
+      <p:sp>
+        <p:nvSpPr>
+          <p:cNvPr id="9" name="PlaceHolder 2"/>
           <p:cNvSpPr>
             <a:spLocks noGrp="1"/>
           </p:cNvSpPr>
@@ -922,8 +883,8 @@
         </p:nvSpPr>
         <p:spPr>
           <a:xfrm>
-            <a:off x="550800" y="4568400"/>
-            <a:ext cx="3089160" cy="840960"/>
+            <a:off x="609480" y="1604520"/>
+            <a:ext cx="5354280" cy="3977280"/>
           </a:xfrm>
           <a:prstGeom prst="rect">
             <a:avLst/>
@@ -938,18 +899,15 @@
             <a:normAutofit/>
           </a:bodyPr>
           <a:p>
-            <a:endParaRPr b="0" lang="ru-RU" sz="1800" spc="-1" strike="noStrike">
-              <a:solidFill>
-                <a:srgbClr val="242834"/>
-              </a:solidFill>
-              <a:latin typeface="Arial"/>
-            </a:endParaRPr>
-          </a:p>
-        </p:txBody>
-      </p:sp>
-      <p:sp>
-        <p:nvSpPr>
-          <p:cNvPr id="11" name="PlaceHolder 3"/>
+            <a:endParaRPr b="0" lang="en-US" sz="3200" spc="-1" strike="noStrike">
+              <a:latin typeface="Arial"/>
+            </a:endParaRPr>
+          </a:p>
+        </p:txBody>
+      </p:sp>
+      <p:sp>
+        <p:nvSpPr>
+          <p:cNvPr id="10" name="PlaceHolder 3"/>
           <p:cNvSpPr>
             <a:spLocks noGrp="1"/>
           </p:cNvSpPr>
@@ -959,8 +917,8 @@
         </p:nvSpPr>
         <p:spPr>
           <a:xfrm>
-            <a:off x="3794760" y="4568400"/>
-            <a:ext cx="3089160" cy="840960"/>
+            <a:off x="6231960" y="1604520"/>
+            <a:ext cx="5354280" cy="3977280"/>
           </a:xfrm>
           <a:prstGeom prst="rect">
             <a:avLst/>
@@ -975,10 +933,7 @@
             <a:normAutofit/>
           </a:bodyPr>
           <a:p>
-            <a:endParaRPr b="0" lang="ru-RU" sz="1800" spc="-1" strike="noStrike">
-              <a:solidFill>
-                <a:srgbClr val="242834"/>
-              </a:solidFill>
+            <a:endParaRPr b="0" lang="en-US" sz="3200" spc="-1" strike="noStrike">
               <a:latin typeface="Arial"/>
             </a:endParaRPr>
           </a:p>
@@ -1008,7 +963,7 @@
       </p:grpSpPr>
       <p:sp>
         <p:nvSpPr>
-          <p:cNvPr id="12" name="PlaceHolder 1"/>
+          <p:cNvPr id="11" name="PlaceHolder 1"/>
           <p:cNvSpPr>
             <a:spLocks noGrp="1"/>
           </p:cNvSpPr>
@@ -1018,8 +973,8 @@
         </p:nvSpPr>
         <p:spPr>
           <a:xfrm>
-            <a:off x="550800" y="2509560"/>
-            <a:ext cx="8051400" cy="1325160"/>
+            <a:off x="609480" y="273600"/>
+            <a:ext cx="10972440" cy="1144800"/>
           </a:xfrm>
           <a:prstGeom prst="rect">
             <a:avLst/>
@@ -1034,10 +989,10 @@
             <a:noAutofit/>
           </a:bodyPr>
           <a:p>
-            <a:endParaRPr b="0" lang="ru-RU" sz="1800" spc="-1" strike="noStrike">
-              <a:solidFill>
-                <a:srgbClr val="242834"/>
-              </a:solidFill>
+            <a:pPr algn="ctr">
+              <a:buNone/>
+            </a:pPr>
+            <a:endParaRPr b="0" lang="en-US" sz="4400" spc="-1" strike="noStrike">
               <a:latin typeface="Arial"/>
             </a:endParaRPr>
           </a:p>
@@ -1067,7 +1022,7 @@
       </p:grpSpPr>
       <p:sp>
         <p:nvSpPr>
-          <p:cNvPr id="13" name="PlaceHolder 1"/>
+          <p:cNvPr id="12" name="PlaceHolder 1"/>
           <p:cNvSpPr>
             <a:spLocks noGrp="1"/>
           </p:cNvSpPr>
@@ -1077,8 +1032,8 @@
         </p:nvSpPr>
         <p:spPr>
           <a:xfrm>
-            <a:off x="550800" y="2509560"/>
-            <a:ext cx="8051400" cy="6144120"/>
+            <a:off x="609480" y="273600"/>
+            <a:ext cx="10972440" cy="5307840"/>
           </a:xfrm>
           <a:prstGeom prst="rect">
             <a:avLst/>
@@ -1126,7 +1081,7 @@
       </p:grpSpPr>
       <p:sp>
         <p:nvSpPr>
-          <p:cNvPr id="14" name="PlaceHolder 1"/>
+          <p:cNvPr id="13" name="PlaceHolder 1"/>
           <p:cNvSpPr>
             <a:spLocks noGrp="1"/>
           </p:cNvSpPr>
@@ -1136,8 +1091,8 @@
         </p:nvSpPr>
         <p:spPr>
           <a:xfrm>
-            <a:off x="550800" y="2509560"/>
-            <a:ext cx="8051400" cy="1325160"/>
+            <a:off x="609480" y="273600"/>
+            <a:ext cx="10972440" cy="1144800"/>
           </a:xfrm>
           <a:prstGeom prst="rect">
             <a:avLst/>
@@ -1152,18 +1107,18 @@
             <a:noAutofit/>
           </a:bodyPr>
           <a:p>
-            <a:endParaRPr b="0" lang="ru-RU" sz="1800" spc="-1" strike="noStrike">
-              <a:solidFill>
-                <a:srgbClr val="242834"/>
-              </a:solidFill>
-              <a:latin typeface="Arial"/>
-            </a:endParaRPr>
-          </a:p>
-        </p:txBody>
-      </p:sp>
-      <p:sp>
-        <p:nvSpPr>
-          <p:cNvPr id="15" name="PlaceHolder 2"/>
+            <a:pPr algn="ctr">
+              <a:buNone/>
+            </a:pPr>
+            <a:endParaRPr b="0" lang="en-US" sz="4400" spc="-1" strike="noStrike">
+              <a:latin typeface="Arial"/>
+            </a:endParaRPr>
+          </a:p>
+        </p:txBody>
+      </p:sp>
+      <p:sp>
+        <p:nvSpPr>
+          <p:cNvPr id="14" name="PlaceHolder 2"/>
           <p:cNvSpPr>
             <a:spLocks noGrp="1"/>
           </p:cNvSpPr>
@@ -1173,8 +1128,8 @@
         </p:nvSpPr>
         <p:spPr>
           <a:xfrm>
-            <a:off x="550800" y="4568400"/>
-            <a:ext cx="3089160" cy="401040"/>
+            <a:off x="609480" y="1604520"/>
+            <a:ext cx="5354280" cy="1896840"/>
           </a:xfrm>
           <a:prstGeom prst="rect">
             <a:avLst/>
@@ -1189,18 +1144,15 @@
             <a:normAutofit/>
           </a:bodyPr>
           <a:p>
-            <a:endParaRPr b="0" lang="ru-RU" sz="1800" spc="-1" strike="noStrike">
-              <a:solidFill>
-                <a:srgbClr val="242834"/>
-              </a:solidFill>
-              <a:latin typeface="Arial"/>
-            </a:endParaRPr>
-          </a:p>
-        </p:txBody>
-      </p:sp>
-      <p:sp>
-        <p:nvSpPr>
-          <p:cNvPr id="16" name="PlaceHolder 3"/>
+            <a:endParaRPr b="0" lang="en-US" sz="3200" spc="-1" strike="noStrike">
+              <a:latin typeface="Arial"/>
+            </a:endParaRPr>
+          </a:p>
+        </p:txBody>
+      </p:sp>
+      <p:sp>
+        <p:nvSpPr>
+          <p:cNvPr id="15" name="PlaceHolder 3"/>
           <p:cNvSpPr>
             <a:spLocks noGrp="1"/>
           </p:cNvSpPr>
@@ -1210,8 +1162,8 @@
         </p:nvSpPr>
         <p:spPr>
           <a:xfrm>
-            <a:off x="3794760" y="4568400"/>
-            <a:ext cx="3089160" cy="840960"/>
+            <a:off x="6231960" y="1604520"/>
+            <a:ext cx="5354280" cy="3977280"/>
           </a:xfrm>
           <a:prstGeom prst="rect">
             <a:avLst/>
@@ -1226,18 +1178,15 @@
             <a:normAutofit/>
           </a:bodyPr>
           <a:p>
-            <a:endParaRPr b="0" lang="ru-RU" sz="1800" spc="-1" strike="noStrike">
-              <a:solidFill>
-                <a:srgbClr val="242834"/>
-              </a:solidFill>
-              <a:latin typeface="Arial"/>
-            </a:endParaRPr>
-          </a:p>
-        </p:txBody>
-      </p:sp>
-      <p:sp>
-        <p:nvSpPr>
-          <p:cNvPr id="17" name="PlaceHolder 4"/>
+            <a:endParaRPr b="0" lang="en-US" sz="3200" spc="-1" strike="noStrike">
+              <a:latin typeface="Arial"/>
+            </a:endParaRPr>
+          </a:p>
+        </p:txBody>
+      </p:sp>
+      <p:sp>
+        <p:nvSpPr>
+          <p:cNvPr id="16" name="PlaceHolder 4"/>
           <p:cNvSpPr>
             <a:spLocks noGrp="1"/>
           </p:cNvSpPr>
@@ -1247,8 +1196,8 @@
         </p:nvSpPr>
         <p:spPr>
           <a:xfrm>
-            <a:off x="550800" y="5007960"/>
-            <a:ext cx="3089160" cy="401040"/>
+            <a:off x="609480" y="3682080"/>
+            <a:ext cx="5354280" cy="1896840"/>
           </a:xfrm>
           <a:prstGeom prst="rect">
             <a:avLst/>
@@ -1263,10 +1212,7 @@
             <a:normAutofit/>
           </a:bodyPr>
           <a:p>
-            <a:endParaRPr b="0" lang="ru-RU" sz="1800" spc="-1" strike="noStrike">
-              <a:solidFill>
-                <a:srgbClr val="242834"/>
-              </a:solidFill>
+            <a:endParaRPr b="0" lang="en-US" sz="3200" spc="-1" strike="noStrike">
               <a:latin typeface="Arial"/>
             </a:endParaRPr>
           </a:p>
@@ -1296,7 +1242,7 @@
       </p:grpSpPr>
       <p:sp>
         <p:nvSpPr>
-          <p:cNvPr id="18" name="PlaceHolder 1"/>
+          <p:cNvPr id="17" name="PlaceHolder 1"/>
           <p:cNvSpPr>
             <a:spLocks noGrp="1"/>
           </p:cNvSpPr>
@@ -1306,8 +1252,8 @@
         </p:nvSpPr>
         <p:spPr>
           <a:xfrm>
-            <a:off x="550800" y="2509560"/>
-            <a:ext cx="8051400" cy="1325160"/>
+            <a:off x="609480" y="273600"/>
+            <a:ext cx="10972440" cy="1144800"/>
           </a:xfrm>
           <a:prstGeom prst="rect">
             <a:avLst/>
@@ -1322,18 +1268,18 @@
             <a:noAutofit/>
           </a:bodyPr>
           <a:p>
-            <a:endParaRPr b="0" lang="ru-RU" sz="1800" spc="-1" strike="noStrike">
-              <a:solidFill>
-                <a:srgbClr val="242834"/>
-              </a:solidFill>
-              <a:latin typeface="Arial"/>
-            </a:endParaRPr>
-          </a:p>
-        </p:txBody>
-      </p:sp>
-      <p:sp>
-        <p:nvSpPr>
-          <p:cNvPr id="19" name="PlaceHolder 2"/>
+            <a:pPr algn="ctr">
+              <a:buNone/>
+            </a:pPr>
+            <a:endParaRPr b="0" lang="en-US" sz="4400" spc="-1" strike="noStrike">
+              <a:latin typeface="Arial"/>
+            </a:endParaRPr>
+          </a:p>
+        </p:txBody>
+      </p:sp>
+      <p:sp>
+        <p:nvSpPr>
+          <p:cNvPr id="18" name="PlaceHolder 2"/>
           <p:cNvSpPr>
             <a:spLocks noGrp="1"/>
           </p:cNvSpPr>
@@ -1343,8 +1289,8 @@
         </p:nvSpPr>
         <p:spPr>
           <a:xfrm>
-            <a:off x="550800" y="4568400"/>
-            <a:ext cx="3089160" cy="840960"/>
+            <a:off x="609480" y="1604520"/>
+            <a:ext cx="5354280" cy="3977280"/>
           </a:xfrm>
           <a:prstGeom prst="rect">
             <a:avLst/>
@@ -1359,18 +1305,15 @@
             <a:normAutofit/>
           </a:bodyPr>
           <a:p>
-            <a:endParaRPr b="0" lang="ru-RU" sz="1800" spc="-1" strike="noStrike">
-              <a:solidFill>
-                <a:srgbClr val="242834"/>
-              </a:solidFill>
-              <a:latin typeface="Arial"/>
-            </a:endParaRPr>
-          </a:p>
-        </p:txBody>
-      </p:sp>
-      <p:sp>
-        <p:nvSpPr>
-          <p:cNvPr id="20" name="PlaceHolder 3"/>
+            <a:endParaRPr b="0" lang="en-US" sz="3200" spc="-1" strike="noStrike">
+              <a:latin typeface="Arial"/>
+            </a:endParaRPr>
+          </a:p>
+        </p:txBody>
+      </p:sp>
+      <p:sp>
+        <p:nvSpPr>
+          <p:cNvPr id="19" name="PlaceHolder 3"/>
           <p:cNvSpPr>
             <a:spLocks noGrp="1"/>
           </p:cNvSpPr>
@@ -1380,8 +1323,8 @@
         </p:nvSpPr>
         <p:spPr>
           <a:xfrm>
-            <a:off x="3794760" y="4568400"/>
-            <a:ext cx="3089160" cy="401040"/>
+            <a:off x="6231960" y="1604520"/>
+            <a:ext cx="5354280" cy="1896840"/>
           </a:xfrm>
           <a:prstGeom prst="rect">
             <a:avLst/>
@@ -1396,18 +1339,15 @@
             <a:normAutofit/>
           </a:bodyPr>
           <a:p>
-            <a:endParaRPr b="0" lang="ru-RU" sz="1800" spc="-1" strike="noStrike">
-              <a:solidFill>
-                <a:srgbClr val="242834"/>
-              </a:solidFill>
-              <a:latin typeface="Arial"/>
-            </a:endParaRPr>
-          </a:p>
-        </p:txBody>
-      </p:sp>
-      <p:sp>
-        <p:nvSpPr>
-          <p:cNvPr id="21" name="PlaceHolder 4"/>
+            <a:endParaRPr b="0" lang="en-US" sz="3200" spc="-1" strike="noStrike">
+              <a:latin typeface="Arial"/>
+            </a:endParaRPr>
+          </a:p>
+        </p:txBody>
+      </p:sp>
+      <p:sp>
+        <p:nvSpPr>
+          <p:cNvPr id="20" name="PlaceHolder 4"/>
           <p:cNvSpPr>
             <a:spLocks noGrp="1"/>
           </p:cNvSpPr>
@@ -1417,8 +1357,8 @@
         </p:nvSpPr>
         <p:spPr>
           <a:xfrm>
-            <a:off x="3794760" y="5007960"/>
-            <a:ext cx="3089160" cy="401040"/>
+            <a:off x="6231960" y="3682080"/>
+            <a:ext cx="5354280" cy="1896840"/>
           </a:xfrm>
           <a:prstGeom prst="rect">
             <a:avLst/>
@@ -1433,10 +1373,7 @@
             <a:normAutofit/>
           </a:bodyPr>
           <a:p>
-            <a:endParaRPr b="0" lang="ru-RU" sz="1800" spc="-1" strike="noStrike">
-              <a:solidFill>
-                <a:srgbClr val="242834"/>
-              </a:solidFill>
+            <a:endParaRPr b="0" lang="en-US" sz="3200" spc="-1" strike="noStrike">
               <a:latin typeface="Arial"/>
             </a:endParaRPr>
           </a:p>
@@ -1466,7 +1403,7 @@
       </p:grpSpPr>
       <p:sp>
         <p:nvSpPr>
-          <p:cNvPr id="22" name="PlaceHolder 1"/>
+          <p:cNvPr id="21" name="PlaceHolder 1"/>
           <p:cNvSpPr>
             <a:spLocks noGrp="1"/>
           </p:cNvSpPr>
@@ -1476,8 +1413,8 @@
         </p:nvSpPr>
         <p:spPr>
           <a:xfrm>
-            <a:off x="550800" y="2509560"/>
-            <a:ext cx="8051400" cy="1325160"/>
+            <a:off x="609480" y="273600"/>
+            <a:ext cx="10972440" cy="1144800"/>
           </a:xfrm>
           <a:prstGeom prst="rect">
             <a:avLst/>
@@ -1492,18 +1429,18 @@
             <a:noAutofit/>
           </a:bodyPr>
           <a:p>
-            <a:endParaRPr b="0" lang="ru-RU" sz="1800" spc="-1" strike="noStrike">
-              <a:solidFill>
-                <a:srgbClr val="242834"/>
-              </a:solidFill>
-              <a:latin typeface="Arial"/>
-            </a:endParaRPr>
-          </a:p>
-        </p:txBody>
-      </p:sp>
-      <p:sp>
-        <p:nvSpPr>
-          <p:cNvPr id="23" name="PlaceHolder 2"/>
+            <a:pPr algn="ctr">
+              <a:buNone/>
+            </a:pPr>
+            <a:endParaRPr b="0" lang="en-US" sz="4400" spc="-1" strike="noStrike">
+              <a:latin typeface="Arial"/>
+            </a:endParaRPr>
+          </a:p>
+        </p:txBody>
+      </p:sp>
+      <p:sp>
+        <p:nvSpPr>
+          <p:cNvPr id="22" name="PlaceHolder 2"/>
           <p:cNvSpPr>
             <a:spLocks noGrp="1"/>
           </p:cNvSpPr>
@@ -1513,8 +1450,8 @@
         </p:nvSpPr>
         <p:spPr>
           <a:xfrm>
-            <a:off x="550800" y="4568400"/>
-            <a:ext cx="3089160" cy="401040"/>
+            <a:off x="609480" y="1604520"/>
+            <a:ext cx="5354280" cy="1896840"/>
           </a:xfrm>
           <a:prstGeom prst="rect">
             <a:avLst/>
@@ -1529,18 +1466,15 @@
             <a:normAutofit/>
           </a:bodyPr>
           <a:p>
-            <a:endParaRPr b="0" lang="ru-RU" sz="1800" spc="-1" strike="noStrike">
-              <a:solidFill>
-                <a:srgbClr val="242834"/>
-              </a:solidFill>
-              <a:latin typeface="Arial"/>
-            </a:endParaRPr>
-          </a:p>
-        </p:txBody>
-      </p:sp>
-      <p:sp>
-        <p:nvSpPr>
-          <p:cNvPr id="24" name="PlaceHolder 3"/>
+            <a:endParaRPr b="0" lang="en-US" sz="3200" spc="-1" strike="noStrike">
+              <a:latin typeface="Arial"/>
+            </a:endParaRPr>
+          </a:p>
+        </p:txBody>
+      </p:sp>
+      <p:sp>
+        <p:nvSpPr>
+          <p:cNvPr id="23" name="PlaceHolder 3"/>
           <p:cNvSpPr>
             <a:spLocks noGrp="1"/>
           </p:cNvSpPr>
@@ -1550,8 +1484,8 @@
         </p:nvSpPr>
         <p:spPr>
           <a:xfrm>
-            <a:off x="3794760" y="4568400"/>
-            <a:ext cx="3089160" cy="401040"/>
+            <a:off x="6231960" y="1604520"/>
+            <a:ext cx="5354280" cy="1896840"/>
           </a:xfrm>
           <a:prstGeom prst="rect">
             <a:avLst/>
@@ -1566,18 +1500,15 @@
             <a:normAutofit/>
           </a:bodyPr>
           <a:p>
-            <a:endParaRPr b="0" lang="ru-RU" sz="1800" spc="-1" strike="noStrike">
-              <a:solidFill>
-                <a:srgbClr val="242834"/>
-              </a:solidFill>
-              <a:latin typeface="Arial"/>
-            </a:endParaRPr>
-          </a:p>
-        </p:txBody>
-      </p:sp>
-      <p:sp>
-        <p:nvSpPr>
-          <p:cNvPr id="25" name="PlaceHolder 4"/>
+            <a:endParaRPr b="0" lang="en-US" sz="3200" spc="-1" strike="noStrike">
+              <a:latin typeface="Arial"/>
+            </a:endParaRPr>
+          </a:p>
+        </p:txBody>
+      </p:sp>
+      <p:sp>
+        <p:nvSpPr>
+          <p:cNvPr id="24" name="PlaceHolder 4"/>
           <p:cNvSpPr>
             <a:spLocks noGrp="1"/>
           </p:cNvSpPr>
@@ -1587,8 +1518,8 @@
         </p:nvSpPr>
         <p:spPr>
           <a:xfrm>
-            <a:off x="550800" y="5007960"/>
-            <a:ext cx="6330600" cy="401040"/>
+            <a:off x="609480" y="3682080"/>
+            <a:ext cx="10972440" cy="1896840"/>
           </a:xfrm>
           <a:prstGeom prst="rect">
             <a:avLst/>
@@ -1603,10 +1534,7 @@
             <a:normAutofit/>
           </a:bodyPr>
           <a:p>
-            <a:endParaRPr b="0" lang="ru-RU" sz="1800" spc="-1" strike="noStrike">
-              <a:solidFill>
-                <a:srgbClr val="242834"/>
-              </a:solidFill>
+            <a:endParaRPr b="0" lang="en-US" sz="3200" spc="-1" strike="noStrike">
               <a:latin typeface="Arial"/>
             </a:endParaRPr>
           </a:p>
@@ -1650,7 +1578,7 @@
         <p:spPr>
           <a:xfrm>
             <a:off x="0" y="0"/>
-            <a:ext cx="12191760" cy="6857640"/>
+            <a:ext cx="12191400" cy="6857280"/>
           </a:xfrm>
           <a:prstGeom prst="rect">
             <a:avLst/>
@@ -1693,7 +1621,7 @@
         <p:spPr>
           <a:xfrm>
             <a:off x="550800" y="304200"/>
-            <a:ext cx="2827080" cy="1095120"/>
+            <a:ext cx="2826720" cy="1094760"/>
           </a:xfrm>
           <a:prstGeom prst="rect">
             <a:avLst/>
@@ -1715,68 +1643,50 @@
         </p:nvSpPr>
         <p:spPr>
           <a:xfrm>
-            <a:off x="550800" y="2509560"/>
-            <a:ext cx="8051400" cy="1325160"/>
-          </a:xfrm>
-          <a:prstGeom prst="rect">
-            <a:avLst/>
-          </a:prstGeom>
-          <a:noFill/>
-          <a:ln w="0">
-            <a:noFill/>
-          </a:ln>
-        </p:spPr>
-        <p:txBody>
-          <a:bodyPr lIns="0" rIns="0" tIns="0" bIns="0" anchor="b">
+            <a:off x="609480" y="273600"/>
+            <a:ext cx="10972440" cy="1144800"/>
+          </a:xfrm>
+          <a:prstGeom prst="rect">
+            <a:avLst/>
+          </a:prstGeom>
+          <a:noFill/>
+          <a:ln w="0">
+            <a:noFill/>
+          </a:ln>
+        </p:spPr>
+        <p:txBody>
+          <a:bodyPr lIns="0" rIns="0" tIns="0" bIns="0" anchor="ctr">
             <a:noAutofit/>
           </a:bodyPr>
           <a:p>
-            <a:pPr>
-              <a:lnSpc>
-                <a:spcPct val="100000"/>
-              </a:lnSpc>
-              <a:buNone/>
-            </a:pPr>
-            <a:r>
-              <a:rPr b="0" lang="ru-RU" sz="3600" spc="-1" strike="noStrike">
-                <a:solidFill>
-                  <a:srgbClr val="005aaa"/>
-                </a:solidFill>
-                <a:latin typeface="Arial"/>
-              </a:rPr>
-              <a:t>Обра</a:t>
-            </a:r>
-            <a:r>
-              <a:rPr b="0" lang="ru-RU" sz="3600" spc="-1" strike="noStrike">
-                <a:solidFill>
-                  <a:srgbClr val="005aaa"/>
-                </a:solidFill>
-                <a:latin typeface="Arial"/>
-              </a:rPr>
-              <a:t>зец </a:t>
-            </a:r>
-            <a:r>
-              <a:rPr b="0" lang="ru-RU" sz="3600" spc="-1" strike="noStrike">
-                <a:solidFill>
-                  <a:srgbClr val="005aaa"/>
-                </a:solidFill>
-                <a:latin typeface="Arial"/>
-              </a:rPr>
-              <a:t>загол</a:t>
-            </a:r>
-            <a:r>
-              <a:rPr b="0" lang="ru-RU" sz="3600" spc="-1" strike="noStrike">
-                <a:solidFill>
-                  <a:srgbClr val="005aaa"/>
-                </a:solidFill>
-                <a:latin typeface="Arial"/>
-              </a:rPr>
-              <a:t>овка</a:t>
-            </a:r>
-            <a:endParaRPr b="0" lang="ru-RU" sz="3600" spc="-1" strike="noStrike">
-              <a:solidFill>
-                <a:srgbClr val="242834"/>
-              </a:solidFill>
+            <a:pPr algn="ctr">
+              <a:buNone/>
+            </a:pPr>
+            <a:r>
+              <a:rPr b="0" lang="en-US" sz="4400" spc="-1" strike="noStrike">
+                <a:latin typeface="Arial"/>
+              </a:rPr>
+              <a:t>Click to </a:t>
+            </a:r>
+            <a:r>
+              <a:rPr b="0" lang="en-US" sz="4400" spc="-1" strike="noStrike">
+                <a:latin typeface="Arial"/>
+              </a:rPr>
+              <a:t>edit the </a:t>
+            </a:r>
+            <a:r>
+              <a:rPr b="0" lang="en-US" sz="4400" spc="-1" strike="noStrike">
+                <a:latin typeface="Arial"/>
+              </a:rPr>
+              <a:t>title text </a:t>
+            </a:r>
+            <a:r>
+              <a:rPr b="0" lang="en-US" sz="4400" spc="-1" strike="noStrike">
+                <a:latin typeface="Arial"/>
+              </a:rPr>
+              <a:t>format</a:t>
+            </a:r>
+            <a:endParaRPr b="0" lang="en-US" sz="4400" spc="-1" strike="noStrike">
               <a:latin typeface="Arial"/>
             </a:endParaRPr>
           </a:p>
@@ -1794,8 +1704,8 @@
         </p:nvSpPr>
         <p:spPr>
           <a:xfrm>
-            <a:off x="550800" y="4568400"/>
-            <a:ext cx="6330600" cy="840960"/>
+            <a:off x="609480" y="1604520"/>
+            <a:ext cx="10972440" cy="3977280"/>
           </a:xfrm>
           <a:prstGeom prst="rect">
             <a:avLst/>
@@ -1807,89 +1717,159 @@
         </p:spPr>
         <p:txBody>
           <a:bodyPr lIns="0" rIns="0" tIns="0" bIns="0" anchor="t">
-            <a:noAutofit/>
-          </a:bodyPr>
-          <a:p>
-            <a:pPr>
-              <a:lnSpc>
-                <a:spcPct val="100000"/>
-              </a:lnSpc>
-              <a:buNone/>
-              <a:tabLst>
-                <a:tab algn="l" pos="0"/>
-              </a:tabLst>
-            </a:pPr>
-            <a:r>
-              <a:rPr b="0" lang="ru-RU" sz="1800" spc="-1" strike="noStrike">
-                <a:solidFill>
-                  <a:srgbClr val="242834"/>
-                </a:solidFill>
-                <a:latin typeface="Arial"/>
-              </a:rPr>
-              <a:t>Имя Фамилия </a:t>
-            </a:r>
-            <a:endParaRPr b="0" lang="ru-RU" sz="1800" spc="-1" strike="noStrike">
-              <a:solidFill>
-                <a:srgbClr val="242834"/>
-              </a:solidFill>
-              <a:latin typeface="Arial"/>
-            </a:endParaRPr>
-          </a:p>
-        </p:txBody>
-      </p:sp>
-      <p:sp>
-        <p:nvSpPr>
-          <p:cNvPr id="4" name="PlaceHolder 3"/>
-          <p:cNvSpPr>
-            <a:spLocks noGrp="1"/>
-          </p:cNvSpPr>
-          <p:nvPr>
-            <p:ph type="body"/>
-          </p:nvPr>
-        </p:nvSpPr>
-        <p:spPr>
-          <a:xfrm>
-            <a:off x="8152560" y="5994000"/>
-            <a:ext cx="3488040" cy="387360"/>
-          </a:xfrm>
-          <a:prstGeom prst="rect">
-            <a:avLst/>
-          </a:prstGeom>
-          <a:noFill/>
-          <a:ln w="0">
-            <a:noFill/>
-          </a:ln>
-        </p:spPr>
-        <p:txBody>
-          <a:bodyPr lIns="0" rIns="0" tIns="0" bIns="0" anchor="t">
-            <a:noAutofit/>
-          </a:bodyPr>
-          <a:p>
-            <a:pPr algn="r">
-              <a:lnSpc>
-                <a:spcPct val="100000"/>
-              </a:lnSpc>
+            <a:normAutofit/>
+          </a:bodyPr>
+          <a:p>
+            <a:pPr marL="432000" indent="-324000">
               <a:spcBef>
-                <a:spcPts val="499"/>
+                <a:spcPts val="1417"/>
               </a:spcBef>
-              <a:buNone/>
-              <a:tabLst>
-                <a:tab algn="l" pos="0"/>
-              </a:tabLst>
-            </a:pPr>
-            <a:r>
-              <a:rPr b="0" lang="ru-RU" sz="3200" spc="-1" strike="noStrike">
-                <a:solidFill>
-                  <a:srgbClr val="e70f47"/>
-                </a:solidFill>
-                <a:latin typeface="Arial"/>
-              </a:rPr>
-              <a:t>Дата</a:t>
-            </a:r>
-            <a:endParaRPr b="0" lang="ru-RU" sz="3200" spc="-1" strike="noStrike">
-              <a:solidFill>
-                <a:srgbClr val="242834"/>
-              </a:solidFill>
+              <a:buClr>
+                <a:srgbClr val="000000"/>
+              </a:buClr>
+              <a:buSzPct val="45000"/>
+              <a:buFont typeface="Wingdings" charset="2"/>
+              <a:buChar char=""/>
+            </a:pPr>
+            <a:r>
+              <a:rPr b="0" lang="en-US" sz="3200" spc="-1" strike="noStrike">
+                <a:latin typeface="Arial"/>
+              </a:rPr>
+              <a:t>Click to edit the outline text format</a:t>
+            </a:r>
+            <a:endParaRPr b="0" lang="en-US" sz="3200" spc="-1" strike="noStrike">
+              <a:latin typeface="Arial"/>
+            </a:endParaRPr>
+          </a:p>
+          <a:p>
+            <a:pPr lvl="1" marL="864000" indent="-324000">
+              <a:spcBef>
+                <a:spcPts val="1134"/>
+              </a:spcBef>
+              <a:buClr>
+                <a:srgbClr val="000000"/>
+              </a:buClr>
+              <a:buSzPct val="75000"/>
+              <a:buFont typeface="Symbol" charset="2"/>
+              <a:buChar char=""/>
+            </a:pPr>
+            <a:r>
+              <a:rPr b="0" lang="en-US" sz="2800" spc="-1" strike="noStrike">
+                <a:latin typeface="Arial"/>
+              </a:rPr>
+              <a:t>Second Outline Level</a:t>
+            </a:r>
+            <a:endParaRPr b="0" lang="en-US" sz="2800" spc="-1" strike="noStrike">
+              <a:latin typeface="Arial"/>
+            </a:endParaRPr>
+          </a:p>
+          <a:p>
+            <a:pPr lvl="2" marL="1296000" indent="-288000">
+              <a:spcBef>
+                <a:spcPts val="850"/>
+              </a:spcBef>
+              <a:buClr>
+                <a:srgbClr val="000000"/>
+              </a:buClr>
+              <a:buSzPct val="45000"/>
+              <a:buFont typeface="Wingdings" charset="2"/>
+              <a:buChar char=""/>
+            </a:pPr>
+            <a:r>
+              <a:rPr b="0" lang="en-US" sz="2400" spc="-1" strike="noStrike">
+                <a:latin typeface="Arial"/>
+              </a:rPr>
+              <a:t>Third Outline Level</a:t>
+            </a:r>
+            <a:endParaRPr b="0" lang="en-US" sz="2400" spc="-1" strike="noStrike">
+              <a:latin typeface="Arial"/>
+            </a:endParaRPr>
+          </a:p>
+          <a:p>
+            <a:pPr lvl="3" marL="1728000" indent="-216000">
+              <a:spcBef>
+                <a:spcPts val="567"/>
+              </a:spcBef>
+              <a:buClr>
+                <a:srgbClr val="000000"/>
+              </a:buClr>
+              <a:buSzPct val="75000"/>
+              <a:buFont typeface="Symbol" charset="2"/>
+              <a:buChar char=""/>
+            </a:pPr>
+            <a:r>
+              <a:rPr b="0" lang="en-US" sz="2000" spc="-1" strike="noStrike">
+                <a:latin typeface="Arial"/>
+              </a:rPr>
+              <a:t>Fourth Outline Level</a:t>
+            </a:r>
+            <a:endParaRPr b="0" lang="en-US" sz="2000" spc="-1" strike="noStrike">
+              <a:latin typeface="Arial"/>
+            </a:endParaRPr>
+          </a:p>
+          <a:p>
+            <a:pPr lvl="4" marL="2160000" indent="-216000">
+              <a:spcBef>
+                <a:spcPts val="283"/>
+              </a:spcBef>
+              <a:buClr>
+                <a:srgbClr val="000000"/>
+              </a:buClr>
+              <a:buSzPct val="45000"/>
+              <a:buFont typeface="Wingdings" charset="2"/>
+              <a:buChar char=""/>
+            </a:pPr>
+            <a:r>
+              <a:rPr b="0" lang="en-US" sz="2000" spc="-1" strike="noStrike">
+                <a:latin typeface="Arial"/>
+              </a:rPr>
+              <a:t>Fifth Outline Level</a:t>
+            </a:r>
+            <a:endParaRPr b="0" lang="en-US" sz="2000" spc="-1" strike="noStrike">
+              <a:latin typeface="Arial"/>
+            </a:endParaRPr>
+          </a:p>
+          <a:p>
+            <a:pPr lvl="5" marL="2592000" indent="-216000">
+              <a:spcBef>
+                <a:spcPts val="283"/>
+              </a:spcBef>
+              <a:buClr>
+                <a:srgbClr val="000000"/>
+              </a:buClr>
+              <a:buSzPct val="45000"/>
+              <a:buFont typeface="Wingdings" charset="2"/>
+              <a:buChar char=""/>
+            </a:pPr>
+            <a:r>
+              <a:rPr b="0" lang="en-US" sz="2000" spc="-1" strike="noStrike">
+                <a:latin typeface="Arial"/>
+              </a:rPr>
+              <a:t>Sixth Outline Level</a:t>
+            </a:r>
+            <a:endParaRPr b="0" lang="en-US" sz="2000" spc="-1" strike="noStrike">
+              <a:latin typeface="Arial"/>
+            </a:endParaRPr>
+          </a:p>
+          <a:p>
+            <a:pPr lvl="6" marL="3024000" indent="-216000">
+              <a:spcBef>
+                <a:spcPts val="283"/>
+              </a:spcBef>
+              <a:buClr>
+                <a:srgbClr val="000000"/>
+              </a:buClr>
+              <a:buSzPct val="45000"/>
+              <a:buFont typeface="Wingdings" charset="2"/>
+              <a:buChar char=""/>
+            </a:pPr>
+            <a:r>
+              <a:rPr b="0" lang="en-US" sz="2000" spc="-1" strike="noStrike">
+                <a:latin typeface="Arial"/>
+              </a:rPr>
+              <a:t>Seventh Outline Level</a:t>
+            </a:r>
+            <a:endParaRPr b="0" lang="en-US" sz="2000" spc="-1" strike="noStrike">
               <a:latin typeface="Arial"/>
             </a:endParaRPr>
           </a:p>
@@ -1934,7 +1914,7 @@
       </p:grpSpPr>
       <p:sp>
         <p:nvSpPr>
-          <p:cNvPr id="41" name="PlaceHolder 1"/>
+          <p:cNvPr id="40" name="PlaceHolder 1"/>
           <p:cNvSpPr>
             <a:spLocks noGrp="1"/>
           </p:cNvSpPr>
@@ -1945,7 +1925,7 @@
         <p:spPr>
           <a:xfrm>
             <a:off x="550800" y="2509560"/>
-            <a:ext cx="8051400" cy="1325160"/>
+            <a:ext cx="8051040" cy="1324800"/>
           </a:xfrm>
           <a:prstGeom prst="rect">
             <a:avLst/>
@@ -1973,7 +1953,7 @@
                 </a:solidFill>
                 <a:latin typeface="Arial"/>
               </a:rPr>
-              <a:t>Экс</a:t>
+              <a:t>Экспертная </a:t>
             </a:r>
             <a:r>
               <a:rPr b="0" lang="ru-RU" sz="3600" spc="-1" strike="noStrike">
@@ -1982,43 +1962,7 @@
                 </a:solidFill>
                 <a:latin typeface="Arial"/>
               </a:rPr>
-              <a:t>пер</a:t>
-            </a:r>
-            <a:r>
-              <a:rPr b="0" lang="ru-RU" sz="3600" spc="-1" strike="noStrike">
-                <a:solidFill>
-                  <a:srgbClr val="005aaa"/>
-                </a:solidFill>
-                <a:latin typeface="Arial"/>
-              </a:rPr>
-              <a:t>тна</a:t>
-            </a:r>
-            <a:r>
-              <a:rPr b="0" lang="ru-RU" sz="3600" spc="-1" strike="noStrike">
-                <a:solidFill>
-                  <a:srgbClr val="005aaa"/>
-                </a:solidFill>
-                <a:latin typeface="Arial"/>
-              </a:rPr>
-              <a:t>я </a:t>
-            </a:r>
-            <a:r>
-              <a:rPr b="0" lang="ru-RU" sz="3600" spc="-1" strike="noStrike">
-                <a:solidFill>
-                  <a:srgbClr val="005aaa"/>
-                </a:solidFill>
-                <a:latin typeface="Arial"/>
-              </a:rPr>
-              <a:t>оце</a:t>
-            </a:r>
-            <a:r>
-              <a:rPr b="0" lang="ru-RU" sz="3600" spc="-1" strike="noStrike">
-                <a:solidFill>
-                  <a:srgbClr val="005aaa"/>
-                </a:solidFill>
-                <a:latin typeface="Arial"/>
-              </a:rPr>
-              <a:t>нка</a:t>
+              <a:t>оценка</a:t>
             </a:r>
             <a:br>
               <a:rPr sz="3600"/>
@@ -2030,7 +1974,7 @@
                 </a:solidFill>
                 <a:latin typeface="Arial"/>
               </a:rPr>
-              <a:t>сер</a:t>
+              <a:t>сервисов </a:t>
             </a:r>
             <a:r>
               <a:rPr b="0" lang="ru-RU" sz="3600" spc="-1" strike="noStrike">
@@ -2039,43 +1983,7 @@
                 </a:solidFill>
                 <a:latin typeface="Arial"/>
               </a:rPr>
-              <a:t>вис</a:t>
-            </a:r>
-            <a:r>
-              <a:rPr b="0" lang="ru-RU" sz="3600" spc="-1" strike="noStrike">
-                <a:solidFill>
-                  <a:srgbClr val="005aaa"/>
-                </a:solidFill>
-                <a:latin typeface="Arial"/>
-              </a:rPr>
-              <a:t>ов </a:t>
-            </a:r>
-            <a:r>
-              <a:rPr b="0" lang="ru-RU" sz="3600" spc="-1" strike="noStrike">
-                <a:solidFill>
-                  <a:srgbClr val="005aaa"/>
-                </a:solidFill>
-                <a:latin typeface="Arial"/>
-              </a:rPr>
-              <a:t>дос</a:t>
-            </a:r>
-            <a:r>
-              <a:rPr b="0" lang="ru-RU" sz="3600" spc="-1" strike="noStrike">
-                <a:solidFill>
-                  <a:srgbClr val="005aaa"/>
-                </a:solidFill>
-                <a:latin typeface="Arial"/>
-              </a:rPr>
-              <a:t>тавк</a:t>
-            </a:r>
-            <a:r>
-              <a:rPr b="0" lang="ru-RU" sz="3600" spc="-1" strike="noStrike">
-                <a:solidFill>
-                  <a:srgbClr val="005aaa"/>
-                </a:solidFill>
-                <a:latin typeface="Arial"/>
-              </a:rPr>
-              <a:t>и </a:t>
+              <a:t>доставки </a:t>
             </a:r>
             <a:r>
               <a:rPr b="0" lang="ru-RU" sz="3600" spc="-1" strike="noStrike">
@@ -2105,7 +2013,7 @@
                 </a:solidFill>
                 <a:latin typeface="Arial"/>
               </a:rPr>
-              <a:t>фак</a:t>
+              <a:t>факторный </a:t>
             </a:r>
             <a:r>
               <a:rPr b="0" lang="ru-RU" sz="3600" spc="-1" strike="noStrike">
@@ -2114,47 +2022,17 @@
                 </a:solidFill>
                 <a:latin typeface="Arial"/>
               </a:rPr>
-              <a:t>тор</a:t>
-            </a:r>
-            <a:r>
-              <a:rPr b="0" lang="ru-RU" sz="3600" spc="-1" strike="noStrike">
-                <a:solidFill>
-                  <a:srgbClr val="005aaa"/>
-                </a:solidFill>
-                <a:latin typeface="Arial"/>
-              </a:rPr>
-              <a:t>ный </a:t>
-            </a:r>
-            <a:r>
-              <a:rPr b="0" lang="ru-RU" sz="3600" spc="-1" strike="noStrike">
-                <a:solidFill>
-                  <a:srgbClr val="005aaa"/>
-                </a:solidFill>
-                <a:latin typeface="Arial"/>
-              </a:rPr>
-              <a:t>ана</a:t>
-            </a:r>
-            <a:r>
-              <a:rPr b="0" lang="ru-RU" sz="3600" spc="-1" strike="noStrike">
-                <a:solidFill>
-                  <a:srgbClr val="005aaa"/>
-                </a:solidFill>
-                <a:latin typeface="Arial"/>
-              </a:rPr>
-              <a:t>лиз</a:t>
-            </a:r>
-            <a:endParaRPr b="0" lang="ru-RU" sz="3600" spc="-1" strike="noStrike">
-              <a:solidFill>
-                <a:srgbClr val="242834"/>
-              </a:solidFill>
-              <a:latin typeface="Arial"/>
-            </a:endParaRPr>
-          </a:p>
-        </p:txBody>
-      </p:sp>
-      <p:sp>
-        <p:nvSpPr>
-          <p:cNvPr id="42" name="PlaceHolder 2"/>
+              <a:t>анализ</a:t>
+            </a:r>
+            <a:endParaRPr b="0" lang="en-US" sz="3600" spc="-1" strike="noStrike">
+              <a:latin typeface="Arial"/>
+            </a:endParaRPr>
+          </a:p>
+        </p:txBody>
+      </p:sp>
+      <p:sp>
+        <p:nvSpPr>
+          <p:cNvPr id="41" name="PlaceHolder 2"/>
           <p:cNvSpPr>
             <a:spLocks noGrp="1"/>
           </p:cNvSpPr>
@@ -2165,7 +2043,7 @@
         <p:spPr>
           <a:xfrm>
             <a:off x="550800" y="4568400"/>
-            <a:ext cx="6330600" cy="840960"/>
+            <a:ext cx="6330240" cy="840600"/>
           </a:xfrm>
           <a:prstGeom prst="rect">
             <a:avLst/>
@@ -2208,29 +2086,17 @@
                 </a:solidFill>
                 <a:latin typeface="Arial"/>
               </a:rPr>
-              <a:t>Группа 4414: Моисеев Григорий, Герасименко Вадим, </a:t>
-            </a:r>
-            <a:r>
-              <a:rPr b="0" lang="ru-RU" sz="1800" spc="-1" strike="noStrike">
-                <a:solidFill>
-                  <a:srgbClr val="242834"/>
-                </a:solidFill>
-                <a:latin typeface="Arial"/>
-              </a:rPr>
-              <a:t>Куприянов Егор</a:t>
-            </a:r>
-            <a:endParaRPr b="0" lang="ru-RU" sz="1800" spc="-1" strike="noStrike">
-              <a:solidFill>
-                <a:srgbClr val="242834"/>
-              </a:solidFill>
-              <a:latin typeface="Arial"/>
-            </a:endParaRPr>
-          </a:p>
-        </p:txBody>
-      </p:sp>
-      <p:sp>
-        <p:nvSpPr>
-          <p:cNvPr id="43" name="PlaceHolder 3"/>
+              <a:t>Группа 4414: Моисеев Григорий, Герасименко Вадим, Куприянов Егор</a:t>
+            </a:r>
+            <a:endParaRPr b="0" lang="en-US" sz="1800" spc="-1" strike="noStrike">
+              <a:latin typeface="Arial"/>
+            </a:endParaRPr>
+          </a:p>
+        </p:txBody>
+      </p:sp>
+      <p:sp>
+        <p:nvSpPr>
+          <p:cNvPr id="42" name="PlaceHolder 3"/>
           <p:cNvSpPr>
             <a:spLocks noGrp="1"/>
           </p:cNvSpPr>
@@ -2241,7 +2107,7 @@
         <p:spPr>
           <a:xfrm>
             <a:off x="8152560" y="5994000"/>
-            <a:ext cx="3488040" cy="387360"/>
+            <a:ext cx="3487680" cy="387000"/>
           </a:xfrm>
           <a:prstGeom prst="rect">
             <a:avLst/>
@@ -2275,12 +2141,18 @@
                 </a:solidFill>
                 <a:latin typeface="Arial"/>
               </a:rPr>
+              <a:t>                                              </a:t>
+            </a:r>
+            <a:r>
+              <a:rPr b="0" lang="ru-RU" sz="1800" spc="-1" strike="noStrike">
+                <a:solidFill>
+                  <a:srgbClr val="242834"/>
+                </a:solidFill>
+                <a:latin typeface="Arial"/>
+              </a:rPr>
               <a:t>2026</a:t>
             </a:r>
-            <a:endParaRPr b="0" lang="ru-RU" sz="1800" spc="-1" strike="noStrike">
-              <a:solidFill>
-                <a:srgbClr val="242834"/>
-              </a:solidFill>
+            <a:endParaRPr b="0" lang="en-US" sz="1800" spc="-1" strike="noStrike">
               <a:latin typeface="Arial"/>
             </a:endParaRPr>
           </a:p>
@@ -2318,14 +2190,14 @@
       </p:grpSpPr>
       <p:sp>
         <p:nvSpPr>
-          <p:cNvPr id="147" name="Rectangle 1"/>
+          <p:cNvPr id="146" name="Rectangle 1"/>
           <p:cNvSpPr/>
           <p:nvPr/>
         </p:nvSpPr>
         <p:spPr>
           <a:xfrm>
             <a:off x="0" y="0"/>
-            <a:ext cx="12191760" cy="6857640"/>
+            <a:ext cx="12191400" cy="6857280"/>
           </a:xfrm>
           <a:prstGeom prst="rect">
             <a:avLst/>
@@ -2336,6 +2208,13 @@
           <a:ln>
             <a:noFill/>
           </a:ln>
+          <a:effectLst>
+            <a:outerShdw blurRad="39960" dir="5400000" dist="23040" rotWithShape="0">
+              <a:srgbClr val="000000">
+                <a:alpha val="35000"/>
+              </a:srgbClr>
+            </a:outerShdw>
+          </a:effectLst>
         </p:spPr>
         <p:style>
           <a:lnRef idx="1">
@@ -2352,14 +2231,14 @@
       </p:sp>
       <p:sp>
         <p:nvSpPr>
-          <p:cNvPr id="148" name="Rectangle 2"/>
+          <p:cNvPr id="147" name="Rectangle 2"/>
           <p:cNvSpPr/>
           <p:nvPr/>
         </p:nvSpPr>
         <p:spPr>
           <a:xfrm>
             <a:off x="0" y="0"/>
-            <a:ext cx="12191760" cy="109440"/>
+            <a:ext cx="12191400" cy="109080"/>
           </a:xfrm>
           <a:prstGeom prst="rect">
             <a:avLst/>
@@ -2370,6 +2249,13 @@
           <a:ln>
             <a:noFill/>
           </a:ln>
+          <a:effectLst>
+            <a:outerShdw blurRad="39960" dir="5400000" dist="23040" rotWithShape="0">
+              <a:srgbClr val="000000">
+                <a:alpha val="35000"/>
+              </a:srgbClr>
+            </a:outerShdw>
+          </a:effectLst>
         </p:spPr>
         <p:style>
           <a:lnRef idx="1">
@@ -2386,14 +2272,14 @@
       </p:sp>
       <p:sp>
         <p:nvSpPr>
-          <p:cNvPr id="149" name="TextBox 3"/>
+          <p:cNvPr id="148" name="TextBox 3"/>
           <p:cNvSpPr/>
           <p:nvPr/>
         </p:nvSpPr>
         <p:spPr>
           <a:xfrm>
             <a:off x="411480" y="210240"/>
-            <a:ext cx="594000" cy="272160"/>
+            <a:ext cx="593640" cy="272160"/>
           </a:xfrm>
           <a:prstGeom prst="rect">
             <a:avLst/>
@@ -2426,6 +2312,7 @@
                   <a:srgbClr val="f28e2b"/>
                 </a:solidFill>
                 <a:latin typeface="Arial"/>
+                <a:ea typeface="DejaVu Sans"/>
               </a:rPr>
               <a:t>10</a:t>
             </a:r>
@@ -2437,14 +2324,14 @@
       </p:sp>
       <p:sp>
         <p:nvSpPr>
-          <p:cNvPr id="150" name="TextBox 4"/>
+          <p:cNvPr id="149" name="TextBox 4"/>
           <p:cNvSpPr/>
           <p:nvPr/>
         </p:nvSpPr>
         <p:spPr>
           <a:xfrm>
             <a:off x="841320" y="182880"/>
-            <a:ext cx="8960760" cy="455400"/>
+            <a:ext cx="8960400" cy="455400"/>
           </a:xfrm>
           <a:prstGeom prst="rect">
             <a:avLst/>
@@ -2477,6 +2364,7 @@
                   <a:srgbClr val="0e3865"/>
                 </a:solidFill>
                 <a:latin typeface="Arial"/>
+                <a:ea typeface="DejaVu Sans"/>
               </a:rPr>
               <a:t>Итоговые выводы</a:t>
             </a:r>
@@ -2488,14 +2376,14 @@
       </p:sp>
       <p:sp>
         <p:nvSpPr>
-          <p:cNvPr id="151" name="TextBox 5"/>
+          <p:cNvPr id="150" name="TextBox 5"/>
           <p:cNvSpPr/>
           <p:nvPr/>
         </p:nvSpPr>
         <p:spPr>
           <a:xfrm>
             <a:off x="859680" y="576000"/>
-            <a:ext cx="10149480" cy="266040"/>
+            <a:ext cx="10149120" cy="266040"/>
           </a:xfrm>
           <a:prstGeom prst="rect">
             <a:avLst/>
@@ -2528,6 +2416,7 @@
                   <a:srgbClr val="606b7b"/>
                 </a:solidFill>
                 <a:latin typeface="Arial"/>
+                <a:ea typeface="DejaVu Sans"/>
               </a:rPr>
               <a:t>Краткое резюме всей работы в трёх содержательных тезисах</a:t>
             </a:r>
@@ -2539,14 +2428,14 @@
       </p:sp>
       <p:sp>
         <p:nvSpPr>
-          <p:cNvPr id="152" name="Rounded Rectangle 6"/>
+          <p:cNvPr id="151" name="Rounded Rectangle 6"/>
           <p:cNvSpPr/>
           <p:nvPr/>
         </p:nvSpPr>
         <p:spPr>
           <a:xfrm>
             <a:off x="822960" y="1234440"/>
-            <a:ext cx="3154320" cy="1874160"/>
+            <a:ext cx="3153960" cy="1873800"/>
           </a:xfrm>
           <a:prstGeom prst="roundRect">
             <a:avLst>
@@ -2561,6 +2450,13 @@
               <a:srgbClr val="e8eff7"/>
             </a:solidFill>
           </a:ln>
+          <a:effectLst>
+            <a:outerShdw blurRad="39960" dir="5400000" dist="23040" rotWithShape="0">
+              <a:srgbClr val="000000">
+                <a:alpha val="35000"/>
+              </a:srgbClr>
+            </a:outerShdw>
+          </a:effectLst>
         </p:spPr>
         <p:style>
           <a:lnRef idx="1">
@@ -2577,14 +2473,14 @@
       </p:sp>
       <p:sp>
         <p:nvSpPr>
-          <p:cNvPr id="153" name="TextBox 7"/>
+          <p:cNvPr id="152" name="TextBox 7"/>
           <p:cNvSpPr/>
           <p:nvPr/>
         </p:nvSpPr>
         <p:spPr>
           <a:xfrm>
             <a:off x="951120" y="1344240"/>
-            <a:ext cx="2898360" cy="1456560"/>
+            <a:ext cx="2898000" cy="1456560"/>
           </a:xfrm>
           <a:prstGeom prst="rect">
             <a:avLst/>
@@ -2617,6 +2513,7 @@
                   <a:srgbClr val="0e3865"/>
                 </a:solidFill>
                 <a:latin typeface="Arial"/>
+                <a:ea typeface="DejaVu Sans"/>
               </a:rPr>
               <a:t>1. Кто выглядит сильнее</a:t>
             </a:r>
@@ -2640,6 +2537,7 @@
                   <a:srgbClr val="1f2937"/>
                 </a:solidFill>
                 <a:latin typeface="Arial"/>
+                <a:ea typeface="DejaVu Sans"/>
               </a:rPr>
               <a:t>Самокат — лидер по интегральной оценке и среднему рангу; Яндекс Еда выделяется по качеству и как наиболее привычный сервис; Ozon Fresh лучше воспринимается по цене.</a:t>
             </a:r>
@@ -2651,14 +2549,14 @@
       </p:sp>
       <p:sp>
         <p:nvSpPr>
-          <p:cNvPr id="154" name="Rounded Rectangle 8"/>
+          <p:cNvPr id="153" name="Rounded Rectangle 8"/>
           <p:cNvSpPr/>
           <p:nvPr/>
         </p:nvSpPr>
         <p:spPr>
           <a:xfrm>
             <a:off x="4206240" y="1234440"/>
-            <a:ext cx="3154320" cy="1874160"/>
+            <a:ext cx="3153960" cy="1873800"/>
           </a:xfrm>
           <a:prstGeom prst="roundRect">
             <a:avLst>
@@ -2673,6 +2571,13 @@
               <a:srgbClr val="e8eff7"/>
             </a:solidFill>
           </a:ln>
+          <a:effectLst>
+            <a:outerShdw blurRad="39960" dir="5400000" dist="23040" rotWithShape="0">
+              <a:srgbClr val="000000">
+                <a:alpha val="35000"/>
+              </a:srgbClr>
+            </a:outerShdw>
+          </a:effectLst>
         </p:spPr>
         <p:style>
           <a:lnRef idx="1">
@@ -2689,14 +2594,14 @@
       </p:sp>
       <p:sp>
         <p:nvSpPr>
-          <p:cNvPr id="155" name="TextBox 9"/>
+          <p:cNvPr id="154" name="TextBox 9"/>
           <p:cNvSpPr/>
           <p:nvPr/>
         </p:nvSpPr>
         <p:spPr>
           <a:xfrm>
             <a:off x="4334400" y="1344240"/>
-            <a:ext cx="2898360" cy="1272240"/>
+            <a:ext cx="2898000" cy="1272240"/>
           </a:xfrm>
           <a:prstGeom prst="rect">
             <a:avLst/>
@@ -2729,6 +2634,7 @@
                   <a:srgbClr val="0e3865"/>
                 </a:solidFill>
                 <a:latin typeface="Arial"/>
+                <a:ea typeface="DejaVu Sans"/>
               </a:rPr>
               <a:t>2. Почему оценки расходятся</a:t>
             </a:r>
@@ -2752,6 +2658,7 @@
                   <a:srgbClr val="1f2937"/>
                 </a:solidFill>
                 <a:latin typeface="Arial"/>
+                <a:ea typeface="DejaVu Sans"/>
               </a:rPr>
               <a:t>Сервисы сильны в разных сценариях, а сами респонденты отличаются по уровню вовлечённости, бюджету и критериям выбора.</a:t>
             </a:r>
@@ -2763,14 +2670,14 @@
       </p:sp>
       <p:sp>
         <p:nvSpPr>
-          <p:cNvPr id="156" name="Rounded Rectangle 10"/>
+          <p:cNvPr id="155" name="Rounded Rectangle 10"/>
           <p:cNvSpPr/>
           <p:nvPr/>
         </p:nvSpPr>
         <p:spPr>
           <a:xfrm>
             <a:off x="7589520" y="1234440"/>
-            <a:ext cx="3154320" cy="1874160"/>
+            <a:ext cx="3153960" cy="1873800"/>
           </a:xfrm>
           <a:prstGeom prst="roundRect">
             <a:avLst>
@@ -2785,6 +2692,13 @@
               <a:srgbClr val="e8eff7"/>
             </a:solidFill>
           </a:ln>
+          <a:effectLst>
+            <a:outerShdw blurRad="39960" dir="5400000" dist="23040" rotWithShape="0">
+              <a:srgbClr val="000000">
+                <a:alpha val="35000"/>
+              </a:srgbClr>
+            </a:outerShdw>
+          </a:effectLst>
         </p:spPr>
         <p:style>
           <a:lnRef idx="1">
@@ -2801,14 +2715,14 @@
       </p:sp>
       <p:sp>
         <p:nvSpPr>
-          <p:cNvPr id="157" name="TextBox 11"/>
+          <p:cNvPr id="156" name="TextBox 11"/>
           <p:cNvSpPr/>
           <p:nvPr/>
         </p:nvSpPr>
         <p:spPr>
           <a:xfrm>
             <a:off x="7717680" y="1344240"/>
-            <a:ext cx="2898360" cy="1087920"/>
+            <a:ext cx="2898000" cy="1087920"/>
           </a:xfrm>
           <a:prstGeom prst="rect">
             <a:avLst/>
@@ -2841,6 +2755,7 @@
                   <a:srgbClr val="0e3865"/>
                 </a:solidFill>
                 <a:latin typeface="Arial"/>
+                <a:ea typeface="DejaVu Sans"/>
               </a:rPr>
               <a:t>3. Что показала модель</a:t>
             </a:r>
@@ -2864,6 +2779,7 @@
                   <a:srgbClr val="1f2937"/>
                 </a:solidFill>
                 <a:latin typeface="Arial"/>
+                <a:ea typeface="DejaVu Sans"/>
               </a:rPr>
               <a:t>Готовность рекомендовать сервис определяется не только общей оценкой, но и экономическим поведением пользователя.</a:t>
             </a:r>
@@ -2875,14 +2791,14 @@
       </p:sp>
       <p:sp>
         <p:nvSpPr>
-          <p:cNvPr id="158" name="TextBox 12"/>
+          <p:cNvPr id="157" name="TextBox 12"/>
           <p:cNvSpPr/>
           <p:nvPr/>
         </p:nvSpPr>
         <p:spPr>
           <a:xfrm>
             <a:off x="1005840" y="3794760"/>
-            <a:ext cx="9829440" cy="394560"/>
+            <a:ext cx="9829080" cy="394560"/>
           </a:xfrm>
           <a:prstGeom prst="rect">
             <a:avLst/>
@@ -2915,6 +2831,7 @@
                   <a:srgbClr val="0e3865"/>
                 </a:solidFill>
                 <a:latin typeface="Arial"/>
+                <a:ea typeface="DejaVu Sans"/>
               </a:rPr>
               <a:t>Общий вывод</a:t>
             </a:r>
@@ -2926,14 +2843,14 @@
       </p:sp>
       <p:sp>
         <p:nvSpPr>
-          <p:cNvPr id="159" name="TextBox 13"/>
+          <p:cNvPr id="158" name="TextBox 13"/>
           <p:cNvSpPr/>
           <p:nvPr/>
         </p:nvSpPr>
         <p:spPr>
           <a:xfrm>
             <a:off x="1005840" y="4224600"/>
-            <a:ext cx="9829440" cy="802440"/>
+            <a:ext cx="9829080" cy="802440"/>
           </a:xfrm>
           <a:prstGeom prst="rect">
             <a:avLst/>
@@ -2966,6 +2883,7 @@
                   <a:srgbClr val="1f2937"/>
                 </a:solidFill>
                 <a:latin typeface="Arial"/>
+                <a:ea typeface="DejaVu Sans"/>
               </a:rPr>
               <a:t>Для студентов «лучший» сервис — не универсальный лидер, а сервис, который лучше решает конкретную задачу: быстро доставить, дать выгодное предложение или обеспечить привычный и надёжный пользовательский опыт.</a:t>
             </a:r>
@@ -2977,14 +2895,14 @@
       </p:sp>
       <p:sp>
         <p:nvSpPr>
-          <p:cNvPr id="160" name="Rectangle 14"/>
+          <p:cNvPr id="159" name="Rectangle 14"/>
           <p:cNvSpPr/>
           <p:nvPr/>
         </p:nvSpPr>
         <p:spPr>
           <a:xfrm>
             <a:off x="1417320" y="5394960"/>
-            <a:ext cx="9006480" cy="18000"/>
+            <a:ext cx="9006120" cy="17640"/>
           </a:xfrm>
           <a:prstGeom prst="rect">
             <a:avLst/>
@@ -2995,6 +2913,13 @@
           <a:ln>
             <a:noFill/>
           </a:ln>
+          <a:effectLst>
+            <a:outerShdw blurRad="39960" dir="5400000" dist="23040" rotWithShape="0">
+              <a:srgbClr val="000000">
+                <a:alpha val="35000"/>
+              </a:srgbClr>
+            </a:outerShdw>
+          </a:effectLst>
         </p:spPr>
         <p:style>
           <a:lnRef idx="1">
@@ -3011,14 +2936,14 @@
       </p:sp>
       <p:sp>
         <p:nvSpPr>
-          <p:cNvPr id="161" name="TextBox 15"/>
+          <p:cNvPr id="160" name="TextBox 15"/>
           <p:cNvSpPr/>
           <p:nvPr/>
         </p:nvSpPr>
         <p:spPr>
           <a:xfrm>
             <a:off x="1005840" y="5532120"/>
-            <a:ext cx="9829440" cy="394560"/>
+            <a:ext cx="9829080" cy="394560"/>
           </a:xfrm>
           <a:prstGeom prst="rect">
             <a:avLst/>
@@ -3051,6 +2976,7 @@
                   <a:srgbClr val="f28e2b"/>
                 </a:solidFill>
                 <a:latin typeface="Arial"/>
+                <a:ea typeface="DejaVu Sans"/>
               </a:rPr>
               <a:t>Спасибо за внимание</a:t>
             </a:r>
@@ -3092,14 +3018,14 @@
       </p:grpSpPr>
       <p:sp>
         <p:nvSpPr>
-          <p:cNvPr id="44" name="Rectangle 1"/>
+          <p:cNvPr id="43" name="Rectangle 1"/>
           <p:cNvSpPr/>
           <p:nvPr/>
         </p:nvSpPr>
         <p:spPr>
           <a:xfrm>
             <a:off x="0" y="0"/>
-            <a:ext cx="12191760" cy="6857640"/>
+            <a:ext cx="12191400" cy="6857280"/>
           </a:xfrm>
           <a:prstGeom prst="rect">
             <a:avLst/>
@@ -3110,6 +3036,13 @@
           <a:ln>
             <a:noFill/>
           </a:ln>
+          <a:effectLst>
+            <a:outerShdw blurRad="39960" dir="5400000" dist="23040" rotWithShape="0">
+              <a:srgbClr val="000000">
+                <a:alpha val="35000"/>
+              </a:srgbClr>
+            </a:outerShdw>
+          </a:effectLst>
         </p:spPr>
         <p:style>
           <a:lnRef idx="1">
@@ -3126,14 +3059,14 @@
       </p:sp>
       <p:sp>
         <p:nvSpPr>
-          <p:cNvPr id="45" name="Rectangle 2"/>
+          <p:cNvPr id="44" name="Rectangle 2"/>
           <p:cNvSpPr/>
           <p:nvPr/>
         </p:nvSpPr>
         <p:spPr>
           <a:xfrm>
             <a:off x="0" y="0"/>
-            <a:ext cx="12191760" cy="109440"/>
+            <a:ext cx="12191400" cy="109080"/>
           </a:xfrm>
           <a:prstGeom prst="rect">
             <a:avLst/>
@@ -3144,6 +3077,13 @@
           <a:ln>
             <a:noFill/>
           </a:ln>
+          <a:effectLst>
+            <a:outerShdw blurRad="39960" dir="5400000" dist="23040" rotWithShape="0">
+              <a:srgbClr val="000000">
+                <a:alpha val="35000"/>
+              </a:srgbClr>
+            </a:outerShdw>
+          </a:effectLst>
         </p:spPr>
         <p:style>
           <a:lnRef idx="1">
@@ -3160,14 +3100,14 @@
       </p:sp>
       <p:sp>
         <p:nvSpPr>
-          <p:cNvPr id="46" name="TextBox 3"/>
+          <p:cNvPr id="45" name="TextBox 3"/>
           <p:cNvSpPr/>
           <p:nvPr/>
         </p:nvSpPr>
         <p:spPr>
           <a:xfrm>
             <a:off x="411480" y="210240"/>
-            <a:ext cx="594000" cy="272160"/>
+            <a:ext cx="593640" cy="272160"/>
           </a:xfrm>
           <a:prstGeom prst="rect">
             <a:avLst/>
@@ -3200,6 +3140,7 @@
                   <a:srgbClr val="f28e2b"/>
                 </a:solidFill>
                 <a:latin typeface="Arial"/>
+                <a:ea typeface="DejaVu Sans"/>
               </a:rPr>
               <a:t>02</a:t>
             </a:r>
@@ -3211,14 +3152,14 @@
       </p:sp>
       <p:sp>
         <p:nvSpPr>
-          <p:cNvPr id="47" name="TextBox 4"/>
+          <p:cNvPr id="46" name="TextBox 4"/>
           <p:cNvSpPr/>
           <p:nvPr/>
         </p:nvSpPr>
         <p:spPr>
           <a:xfrm>
             <a:off x="841320" y="182880"/>
-            <a:ext cx="8960760" cy="455400"/>
+            <a:ext cx="8960400" cy="455400"/>
           </a:xfrm>
           <a:prstGeom prst="rect">
             <a:avLst/>
@@ -3251,6 +3192,7 @@
                   <a:srgbClr val="0e3865"/>
                 </a:solidFill>
                 <a:latin typeface="Arial"/>
+                <a:ea typeface="DejaVu Sans"/>
               </a:rPr>
               <a:t>Замысел исследования</a:t>
             </a:r>
@@ -3262,14 +3204,14 @@
       </p:sp>
       <p:sp>
         <p:nvSpPr>
-          <p:cNvPr id="48" name="TextBox 5"/>
+          <p:cNvPr id="47" name="TextBox 5"/>
           <p:cNvSpPr/>
           <p:nvPr/>
         </p:nvSpPr>
         <p:spPr>
           <a:xfrm>
             <a:off x="859680" y="576000"/>
-            <a:ext cx="10149480" cy="266040"/>
+            <a:ext cx="10149120" cy="266040"/>
           </a:xfrm>
           <a:prstGeom prst="rect">
             <a:avLst/>
@@ -3302,6 +3244,7 @@
                   <a:srgbClr val="606b7b"/>
                 </a:solidFill>
                 <a:latin typeface="Arial"/>
+                <a:ea typeface="DejaVu Sans"/>
               </a:rPr>
               <a:t>Что именно изучалось, на каких данных и какими методами</a:t>
             </a:r>
@@ -3313,14 +3256,14 @@
       </p:sp>
       <p:sp>
         <p:nvSpPr>
-          <p:cNvPr id="49" name="Rounded Rectangle 6"/>
+          <p:cNvPr id="48" name="Rounded Rectangle 6"/>
           <p:cNvSpPr/>
           <p:nvPr/>
         </p:nvSpPr>
         <p:spPr>
           <a:xfrm>
             <a:off x="777240" y="1143000"/>
-            <a:ext cx="3154320" cy="1416960"/>
+            <a:ext cx="3153960" cy="1416600"/>
           </a:xfrm>
           <a:prstGeom prst="roundRect">
             <a:avLst>
@@ -3335,6 +3278,13 @@
               <a:srgbClr val="e8eff7"/>
             </a:solidFill>
           </a:ln>
+          <a:effectLst>
+            <a:outerShdw blurRad="39960" dir="5400000" dist="23040" rotWithShape="0">
+              <a:srgbClr val="000000">
+                <a:alpha val="35000"/>
+              </a:srgbClr>
+            </a:outerShdw>
+          </a:effectLst>
         </p:spPr>
         <p:style>
           <a:lnRef idx="1">
@@ -3351,14 +3301,14 @@
       </p:sp>
       <p:sp>
         <p:nvSpPr>
-          <p:cNvPr id="50" name="TextBox 7"/>
+          <p:cNvPr id="49" name="TextBox 7"/>
           <p:cNvSpPr/>
           <p:nvPr/>
         </p:nvSpPr>
         <p:spPr>
           <a:xfrm>
             <a:off x="905400" y="1252800"/>
-            <a:ext cx="2898360" cy="903600"/>
+            <a:ext cx="2898000" cy="903600"/>
           </a:xfrm>
           <a:prstGeom prst="rect">
             <a:avLst/>
@@ -3391,6 +3341,7 @@
                   <a:srgbClr val="0e3865"/>
                 </a:solidFill>
                 <a:latin typeface="Arial"/>
+                <a:ea typeface="DejaVu Sans"/>
               </a:rPr>
               <a:t>Объект исследования</a:t>
             </a:r>
@@ -3414,6 +3365,7 @@
                   <a:srgbClr val="1f2937"/>
                 </a:solidFill>
                 <a:latin typeface="Arial"/>
+                <a:ea typeface="DejaVu Sans"/>
               </a:rPr>
               <a:t>Пять сервисов доставки еды: Яндекс Еда, Самокат, Delivery Club, Купер и Ozon Fresh.</a:t>
             </a:r>
@@ -3425,14 +3377,14 @@
       </p:sp>
       <p:sp>
         <p:nvSpPr>
-          <p:cNvPr id="51" name="Rounded Rectangle 8"/>
+          <p:cNvPr id="50" name="Rounded Rectangle 8"/>
           <p:cNvSpPr/>
           <p:nvPr/>
         </p:nvSpPr>
         <p:spPr>
           <a:xfrm>
             <a:off x="4069080" y="1143000"/>
-            <a:ext cx="3154320" cy="1416960"/>
+            <a:ext cx="3153960" cy="1416600"/>
           </a:xfrm>
           <a:prstGeom prst="roundRect">
             <a:avLst>
@@ -3447,6 +3399,13 @@
               <a:srgbClr val="e8eff7"/>
             </a:solidFill>
           </a:ln>
+          <a:effectLst>
+            <a:outerShdw blurRad="39960" dir="5400000" dist="23040" rotWithShape="0">
+              <a:srgbClr val="000000">
+                <a:alpha val="35000"/>
+              </a:srgbClr>
+            </a:outerShdw>
+          </a:effectLst>
         </p:spPr>
         <p:style>
           <a:lnRef idx="1">
@@ -3463,14 +3422,14 @@
       </p:sp>
       <p:sp>
         <p:nvSpPr>
-          <p:cNvPr id="52" name="TextBox 9"/>
+          <p:cNvPr id="51" name="TextBox 9"/>
           <p:cNvSpPr/>
           <p:nvPr/>
         </p:nvSpPr>
         <p:spPr>
           <a:xfrm>
             <a:off x="4197240" y="1252800"/>
-            <a:ext cx="2898360" cy="903600"/>
+            <a:ext cx="2898000" cy="903600"/>
           </a:xfrm>
           <a:prstGeom prst="rect">
             <a:avLst/>
@@ -3503,6 +3462,7 @@
                   <a:srgbClr val="0e3865"/>
                 </a:solidFill>
                 <a:latin typeface="Arial"/>
+                <a:ea typeface="DejaVu Sans"/>
               </a:rPr>
               <a:t>Исходные данные</a:t>
             </a:r>
@@ -3526,6 +3486,7 @@
                   <a:srgbClr val="1f2937"/>
                 </a:solidFill>
                 <a:latin typeface="Arial"/>
+                <a:ea typeface="DejaVu Sans"/>
               </a:rPr>
               <a:t>60 анкет студентов потока 4414–4417; для каждого сервиса собраны оценки цены, скорости и качества.</a:t>
             </a:r>
@@ -3537,14 +3498,14 @@
       </p:sp>
       <p:sp>
         <p:nvSpPr>
-          <p:cNvPr id="53" name="Rounded Rectangle 10"/>
+          <p:cNvPr id="52" name="Rounded Rectangle 10"/>
           <p:cNvSpPr/>
           <p:nvPr/>
         </p:nvSpPr>
         <p:spPr>
           <a:xfrm>
             <a:off x="7360920" y="1143000"/>
-            <a:ext cx="3977280" cy="1416960"/>
+            <a:ext cx="3976920" cy="1416600"/>
           </a:xfrm>
           <a:prstGeom prst="roundRect">
             <a:avLst>
@@ -3559,6 +3520,13 @@
               <a:srgbClr val="e8eff7"/>
             </a:solidFill>
           </a:ln>
+          <a:effectLst>
+            <a:outerShdw blurRad="39960" dir="5400000" dist="23040" rotWithShape="0">
+              <a:srgbClr val="000000">
+                <a:alpha val="35000"/>
+              </a:srgbClr>
+            </a:outerShdw>
+          </a:effectLst>
         </p:spPr>
         <p:style>
           <a:lnRef idx="1">
@@ -3575,14 +3543,14 @@
       </p:sp>
       <p:sp>
         <p:nvSpPr>
-          <p:cNvPr id="54" name="TextBox 11"/>
+          <p:cNvPr id="53" name="TextBox 11"/>
           <p:cNvSpPr/>
           <p:nvPr/>
         </p:nvSpPr>
         <p:spPr>
           <a:xfrm>
             <a:off x="7489080" y="1252800"/>
-            <a:ext cx="3721320" cy="903600"/>
+            <a:ext cx="3720960" cy="903600"/>
           </a:xfrm>
           <a:prstGeom prst="rect">
             <a:avLst/>
@@ -3615,6 +3583,7 @@
                   <a:srgbClr val="0e3865"/>
                 </a:solidFill>
                 <a:latin typeface="Arial"/>
+                <a:ea typeface="DejaVu Sans"/>
               </a:rPr>
               <a:t>Методы анализа</a:t>
             </a:r>
@@ -3638,6 +3607,7 @@
                   <a:srgbClr val="1f2937"/>
                 </a:solidFill>
                 <a:latin typeface="Arial"/>
+                <a:ea typeface="DejaVu Sans"/>
               </a:rPr>
               <a:t>Описательная статистика, факторный анализ (PCA + varimax), критерий Фридмана, коэффициент конкордации и OLS-регрессия.</a:t>
             </a:r>
@@ -3649,14 +3619,14 @@
       </p:sp>
       <p:sp>
         <p:nvSpPr>
-          <p:cNvPr id="55" name="TextBox 12"/>
+          <p:cNvPr id="54" name="TextBox 12"/>
           <p:cNvSpPr/>
           <p:nvPr/>
         </p:nvSpPr>
         <p:spPr>
           <a:xfrm>
             <a:off x="868680" y="2953440"/>
-            <a:ext cx="3200040" cy="363960"/>
+            <a:ext cx="3199680" cy="363960"/>
           </a:xfrm>
           <a:prstGeom prst="rect">
             <a:avLst/>
@@ -3689,6 +3659,7 @@
                   <a:srgbClr val="0e3865"/>
                 </a:solidFill>
                 <a:latin typeface="Arial"/>
+                <a:ea typeface="DejaVu Sans"/>
               </a:rPr>
               <a:t>Что хотим получить</a:t>
             </a:r>
@@ -3700,14 +3671,14 @@
       </p:sp>
       <p:sp>
         <p:nvSpPr>
-          <p:cNvPr id="56" name="TextBox 13"/>
+          <p:cNvPr id="55" name="TextBox 13"/>
           <p:cNvSpPr/>
           <p:nvPr/>
         </p:nvSpPr>
         <p:spPr>
           <a:xfrm>
             <a:off x="914400" y="3383280"/>
-            <a:ext cx="4571640" cy="1594440"/>
+            <a:ext cx="4571280" cy="1594440"/>
           </a:xfrm>
           <a:prstGeom prst="rect">
             <a:avLst/>
@@ -3743,6 +3714,7 @@
                   <a:srgbClr val="1f2937"/>
                 </a:solidFill>
                 <a:latin typeface="Arial"/>
+                <a:ea typeface="DejaVu Sans"/>
               </a:rPr>
               <a:t>понять, какие сервисы студенты оценивают выше;</a:t>
             </a:r>
@@ -3766,6 +3738,7 @@
                   <a:srgbClr val="1f2937"/>
                 </a:solidFill>
                 <a:latin typeface="Arial"/>
+                <a:ea typeface="DejaVu Sans"/>
               </a:rPr>
               <a:t>показать, за счёт каких факторов оценки расходятся;</a:t>
             </a:r>
@@ -3789,6 +3762,7 @@
                   <a:srgbClr val="1f2937"/>
                 </a:solidFill>
                 <a:latin typeface="Arial"/>
+                <a:ea typeface="DejaVu Sans"/>
               </a:rPr>
               <a:t>объяснить, от чего зависит готовность рекомендовать сервис.</a:t>
             </a:r>
@@ -3800,7 +3774,7 @@
       </p:sp>
       <p:pic>
         <p:nvPicPr>
-          <p:cNvPr id="57" name="Picture 14" descr="integral_scores_ranked.png"/>
+          <p:cNvPr id="56" name="Picture 14" descr="integral_scores_ranked.png"/>
           <p:cNvPicPr/>
           <p:nvPr/>
         </p:nvPicPr>
@@ -3811,7 +3785,7 @@
         <p:spPr>
           <a:xfrm>
             <a:off x="5989320" y="2898720"/>
-            <a:ext cx="4891680" cy="2660040"/>
+            <a:ext cx="4891320" cy="2659680"/>
           </a:xfrm>
           <a:prstGeom prst="rect">
             <a:avLst/>
@@ -3823,14 +3797,14 @@
       </p:pic>
       <p:sp>
         <p:nvSpPr>
-          <p:cNvPr id="58" name="TextBox 15"/>
+          <p:cNvPr id="57" name="TextBox 15"/>
           <p:cNvSpPr/>
           <p:nvPr/>
         </p:nvSpPr>
         <p:spPr>
           <a:xfrm>
             <a:off x="6080760" y="5715000"/>
-            <a:ext cx="4663080" cy="454680"/>
+            <a:ext cx="4662720" cy="454680"/>
           </a:xfrm>
           <a:prstGeom prst="rect">
             <a:avLst/>
@@ -3863,6 +3837,7 @@
                   <a:srgbClr val="606b7b"/>
                 </a:solidFill>
                 <a:latin typeface="Arial"/>
+                <a:ea typeface="DejaVu Sans"/>
               </a:rPr>
               <a:t>Интегральный рейтинг нужен как старт, но он не объясняет причин различий — это делают последующие слайды.</a:t>
             </a:r>
@@ -3904,14 +3879,14 @@
       </p:grpSpPr>
       <p:sp>
         <p:nvSpPr>
-          <p:cNvPr id="59" name="Rectangle 1"/>
+          <p:cNvPr id="58" name="Rectangle 1"/>
           <p:cNvSpPr/>
           <p:nvPr/>
         </p:nvSpPr>
         <p:spPr>
           <a:xfrm>
             <a:off x="0" y="0"/>
-            <a:ext cx="12191760" cy="6857640"/>
+            <a:ext cx="12191400" cy="6857280"/>
           </a:xfrm>
           <a:prstGeom prst="rect">
             <a:avLst/>
@@ -3922,6 +3897,13 @@
           <a:ln>
             <a:noFill/>
           </a:ln>
+          <a:effectLst>
+            <a:outerShdw blurRad="39960" dir="5400000" dist="23040" rotWithShape="0">
+              <a:srgbClr val="000000">
+                <a:alpha val="35000"/>
+              </a:srgbClr>
+            </a:outerShdw>
+          </a:effectLst>
         </p:spPr>
         <p:style>
           <a:lnRef idx="1">
@@ -3938,14 +3920,14 @@
       </p:sp>
       <p:sp>
         <p:nvSpPr>
-          <p:cNvPr id="60" name="Rectangle 2"/>
+          <p:cNvPr id="59" name="Rectangle 2"/>
           <p:cNvSpPr/>
           <p:nvPr/>
         </p:nvSpPr>
         <p:spPr>
           <a:xfrm>
             <a:off x="0" y="0"/>
-            <a:ext cx="12191760" cy="109440"/>
+            <a:ext cx="12191400" cy="109080"/>
           </a:xfrm>
           <a:prstGeom prst="rect">
             <a:avLst/>
@@ -3956,6 +3938,13 @@
           <a:ln>
             <a:noFill/>
           </a:ln>
+          <a:effectLst>
+            <a:outerShdw blurRad="39960" dir="5400000" dist="23040" rotWithShape="0">
+              <a:srgbClr val="000000">
+                <a:alpha val="35000"/>
+              </a:srgbClr>
+            </a:outerShdw>
+          </a:effectLst>
         </p:spPr>
         <p:style>
           <a:lnRef idx="1">
@@ -3972,14 +3961,14 @@
       </p:sp>
       <p:sp>
         <p:nvSpPr>
-          <p:cNvPr id="61" name="TextBox 3"/>
+          <p:cNvPr id="60" name="TextBox 3"/>
           <p:cNvSpPr/>
           <p:nvPr/>
         </p:nvSpPr>
         <p:spPr>
           <a:xfrm>
             <a:off x="411480" y="210240"/>
-            <a:ext cx="594000" cy="272160"/>
+            <a:ext cx="593640" cy="272160"/>
           </a:xfrm>
           <a:prstGeom prst="rect">
             <a:avLst/>
@@ -4012,6 +4001,7 @@
                   <a:srgbClr val="f28e2b"/>
                 </a:solidFill>
                 <a:latin typeface="Arial"/>
+                <a:ea typeface="DejaVu Sans"/>
               </a:rPr>
               <a:t>03</a:t>
             </a:r>
@@ -4023,14 +4013,14 @@
       </p:sp>
       <p:sp>
         <p:nvSpPr>
-          <p:cNvPr id="62" name="TextBox 4"/>
+          <p:cNvPr id="61" name="TextBox 4"/>
           <p:cNvSpPr/>
           <p:nvPr/>
         </p:nvSpPr>
         <p:spPr>
           <a:xfrm>
             <a:off x="841320" y="182880"/>
-            <a:ext cx="8960760" cy="455400"/>
+            <a:ext cx="8960400" cy="455400"/>
           </a:xfrm>
           <a:prstGeom prst="rect">
             <a:avLst/>
@@ -4063,6 +4053,7 @@
                   <a:srgbClr val="0e3865"/>
                 </a:solidFill>
                 <a:latin typeface="Arial"/>
+                <a:ea typeface="DejaVu Sans"/>
               </a:rPr>
               <a:t>Портрет выборки</a:t>
             </a:r>
@@ -4074,14 +4065,14 @@
       </p:sp>
       <p:sp>
         <p:nvSpPr>
-          <p:cNvPr id="63" name="TextBox 5"/>
+          <p:cNvPr id="62" name="TextBox 5"/>
           <p:cNvSpPr/>
           <p:nvPr/>
         </p:nvSpPr>
         <p:spPr>
           <a:xfrm>
             <a:off x="859680" y="576000"/>
-            <a:ext cx="10149480" cy="266040"/>
+            <a:ext cx="10149120" cy="266040"/>
           </a:xfrm>
           <a:prstGeom prst="rect">
             <a:avLst/>
@@ -4114,6 +4105,7 @@
                   <a:srgbClr val="606b7b"/>
                 </a:solidFill>
                 <a:latin typeface="Arial"/>
+                <a:ea typeface="DejaVu Sans"/>
               </a:rPr>
               <a:t>Большинство участников знакомо с доставкой на практике, но интенсивность использования различается</a:t>
             </a:r>
@@ -4125,14 +4117,14 @@
       </p:sp>
       <p:sp>
         <p:nvSpPr>
-          <p:cNvPr id="64" name="TextBox 6"/>
+          <p:cNvPr id="63" name="TextBox 6"/>
           <p:cNvSpPr/>
           <p:nvPr/>
         </p:nvSpPr>
         <p:spPr>
           <a:xfrm>
             <a:off x="685800" y="960120"/>
-            <a:ext cx="1096920" cy="424800"/>
+            <a:ext cx="1096560" cy="424800"/>
           </a:xfrm>
           <a:prstGeom prst="rect">
             <a:avLst/>
@@ -4165,6 +4157,7 @@
                   <a:srgbClr val="0e3865"/>
                 </a:solidFill>
                 <a:latin typeface="Arial"/>
+                <a:ea typeface="DejaVu Sans"/>
               </a:rPr>
               <a:t>60</a:t>
             </a:r>
@@ -4176,14 +4169,14 @@
       </p:sp>
       <p:sp>
         <p:nvSpPr>
-          <p:cNvPr id="65" name="TextBox 7"/>
+          <p:cNvPr id="64" name="TextBox 7"/>
           <p:cNvSpPr/>
           <p:nvPr/>
         </p:nvSpPr>
         <p:spPr>
           <a:xfrm>
             <a:off x="658440" y="1298520"/>
-            <a:ext cx="1151640" cy="234360"/>
+            <a:ext cx="1151280" cy="234360"/>
           </a:xfrm>
           <a:prstGeom prst="rect">
             <a:avLst/>
@@ -4216,6 +4209,7 @@
                   <a:srgbClr val="606b7b"/>
                 </a:solidFill>
                 <a:latin typeface="Arial"/>
+                <a:ea typeface="DejaVu Sans"/>
               </a:rPr>
               <a:t>анкет</a:t>
             </a:r>
@@ -4227,14 +4221,14 @@
       </p:sp>
       <p:sp>
         <p:nvSpPr>
-          <p:cNvPr id="66" name="TextBox 8"/>
+          <p:cNvPr id="65" name="TextBox 8"/>
           <p:cNvSpPr/>
           <p:nvPr/>
         </p:nvSpPr>
         <p:spPr>
           <a:xfrm>
             <a:off x="1965960" y="960120"/>
-            <a:ext cx="1096920" cy="424800"/>
+            <a:ext cx="1096560" cy="424800"/>
           </a:xfrm>
           <a:prstGeom prst="rect">
             <a:avLst/>
@@ -4267,6 +4261,7 @@
                   <a:srgbClr val="2c5aa0"/>
                 </a:solidFill>
                 <a:latin typeface="Arial"/>
+                <a:ea typeface="DejaVu Sans"/>
               </a:rPr>
               <a:t>57</a:t>
             </a:r>
@@ -4278,14 +4273,14 @@
       </p:sp>
       <p:sp>
         <p:nvSpPr>
-          <p:cNvPr id="67" name="TextBox 9"/>
+          <p:cNvPr id="66" name="TextBox 9"/>
           <p:cNvSpPr/>
           <p:nvPr/>
         </p:nvSpPr>
         <p:spPr>
           <a:xfrm>
             <a:off x="1938600" y="1298520"/>
-            <a:ext cx="1151640" cy="379080"/>
+            <a:ext cx="1151280" cy="379080"/>
           </a:xfrm>
           <a:prstGeom prst="rect">
             <a:avLst/>
@@ -4318,6 +4313,7 @@
                   <a:srgbClr val="606b7b"/>
                 </a:solidFill>
                 <a:latin typeface="Arial"/>
+                <a:ea typeface="DejaVu Sans"/>
               </a:rPr>
               <a:t>пользовались</a:t>
             </a:r>
@@ -4330,6 +4326,7 @@
                   <a:srgbClr val="606b7b"/>
                 </a:solidFill>
                 <a:latin typeface="Arial"/>
+                <a:ea typeface="DejaVu Sans"/>
               </a:rPr>
               <a:t>за 3 месяца</a:t>
             </a:r>
@@ -4341,14 +4338,14 @@
       </p:sp>
       <p:sp>
         <p:nvSpPr>
-          <p:cNvPr id="68" name="TextBox 10"/>
+          <p:cNvPr id="67" name="TextBox 10"/>
           <p:cNvSpPr/>
           <p:nvPr/>
         </p:nvSpPr>
         <p:spPr>
           <a:xfrm>
             <a:off x="3474720" y="960120"/>
-            <a:ext cx="1096920" cy="759960"/>
+            <a:ext cx="1096560" cy="759960"/>
           </a:xfrm>
           <a:prstGeom prst="rect">
             <a:avLst/>
@@ -4381,6 +4378,7 @@
                   <a:srgbClr val="f28e2b"/>
                 </a:solidFill>
                 <a:latin typeface="Arial"/>
+                <a:ea typeface="DejaVu Sans"/>
               </a:rPr>
               <a:t>3 002 ₽</a:t>
             </a:r>
@@ -4392,14 +4390,14 @@
       </p:sp>
       <p:sp>
         <p:nvSpPr>
-          <p:cNvPr id="69" name="TextBox 11"/>
+          <p:cNvPr id="68" name="TextBox 11"/>
           <p:cNvSpPr/>
           <p:nvPr/>
         </p:nvSpPr>
         <p:spPr>
           <a:xfrm>
             <a:off x="3429000" y="1600200"/>
-            <a:ext cx="1151640" cy="379080"/>
+            <a:ext cx="1151280" cy="379080"/>
           </a:xfrm>
           <a:prstGeom prst="rect">
             <a:avLst/>
@@ -4432,6 +4430,7 @@
                   <a:srgbClr val="606b7b"/>
                 </a:solidFill>
                 <a:latin typeface="Arial"/>
+                <a:ea typeface="DejaVu Sans"/>
               </a:rPr>
               <a:t>средние</a:t>
             </a:r>
@@ -4444,6 +4443,7 @@
                   <a:srgbClr val="606b7b"/>
                 </a:solidFill>
                 <a:latin typeface="Arial"/>
+                <a:ea typeface="DejaVu Sans"/>
               </a:rPr>
               <a:t>расходы</a:t>
             </a:r>
@@ -4455,14 +4455,14 @@
       </p:sp>
       <p:sp>
         <p:nvSpPr>
-          <p:cNvPr id="70" name="TextBox 12"/>
+          <p:cNvPr id="69" name="TextBox 12"/>
           <p:cNvSpPr/>
           <p:nvPr/>
         </p:nvSpPr>
         <p:spPr>
           <a:xfrm>
             <a:off x="5074920" y="960120"/>
-            <a:ext cx="1096920" cy="759960"/>
+            <a:ext cx="1096560" cy="759960"/>
           </a:xfrm>
           <a:prstGeom prst="rect">
             <a:avLst/>
@@ -4495,6 +4495,7 @@
                   <a:srgbClr val="43925f"/>
                 </a:solidFill>
                 <a:latin typeface="Arial"/>
+                <a:ea typeface="DejaVu Sans"/>
               </a:rPr>
               <a:t>1 950 ₽</a:t>
             </a:r>
@@ -4506,14 +4507,14 @@
       </p:sp>
       <p:sp>
         <p:nvSpPr>
-          <p:cNvPr id="71" name="TextBox 13"/>
+          <p:cNvPr id="70" name="TextBox 13"/>
           <p:cNvSpPr/>
           <p:nvPr/>
         </p:nvSpPr>
         <p:spPr>
           <a:xfrm>
             <a:off x="5029200" y="1600200"/>
-            <a:ext cx="1151640" cy="379080"/>
+            <a:ext cx="1151280" cy="379080"/>
           </a:xfrm>
           <a:prstGeom prst="rect">
             <a:avLst/>
@@ -4546,6 +4547,7 @@
                   <a:srgbClr val="606b7b"/>
                 </a:solidFill>
                 <a:latin typeface="Arial"/>
+                <a:ea typeface="DejaVu Sans"/>
               </a:rPr>
               <a:t>медианные</a:t>
             </a:r>
@@ -4558,6 +4560,7 @@
                   <a:srgbClr val="606b7b"/>
                 </a:solidFill>
                 <a:latin typeface="Arial"/>
+                <a:ea typeface="DejaVu Sans"/>
               </a:rPr>
               <a:t>расходы</a:t>
             </a:r>
@@ -4569,7 +4572,7 @@
       </p:sp>
       <p:pic>
         <p:nvPicPr>
-          <p:cNvPr id="72" name="Picture 14" descr="usage_frequency_bar.png"/>
+          <p:cNvPr id="71" name="Picture 14" descr="usage_frequency_bar.png"/>
           <p:cNvPicPr/>
           <p:nvPr/>
         </p:nvPicPr>
@@ -4580,7 +4583,7 @@
         <p:spPr>
           <a:xfrm>
             <a:off x="731520" y="2611440"/>
-            <a:ext cx="5623200" cy="2503440"/>
+            <a:ext cx="5622840" cy="2503080"/>
           </a:xfrm>
           <a:prstGeom prst="rect">
             <a:avLst/>
@@ -4592,14 +4595,14 @@
       </p:pic>
       <p:sp>
         <p:nvSpPr>
-          <p:cNvPr id="73" name="TextBox 16"/>
+          <p:cNvPr id="72" name="TextBox 16"/>
           <p:cNvSpPr/>
           <p:nvPr/>
         </p:nvSpPr>
         <p:spPr>
           <a:xfrm>
             <a:off x="841320" y="5998320"/>
-            <a:ext cx="10149480" cy="466920"/>
+            <a:ext cx="10149120" cy="466920"/>
           </a:xfrm>
           <a:prstGeom prst="rect">
             <a:avLst/>
@@ -4632,6 +4635,7 @@
                   <a:srgbClr val="606b7b"/>
                 </a:solidFill>
                 <a:latin typeface="Arial"/>
+                <a:ea typeface="DejaVu Sans"/>
               </a:rPr>
               <a:t>Вывод: в выборке нет только «случайных» ответов — большинство респондентов регулярно взаимодействует с доставкой и оценивает сервисы из личного опыта.</a:t>
             </a:r>
@@ -4643,7 +4647,7 @@
       </p:sp>
       <p:pic>
         <p:nvPicPr>
-          <p:cNvPr id="74" name="Picture 17" descr="favorite_service_bar.png"/>
+          <p:cNvPr id="73" name="Picture 17" descr="favorite_service_bar.png"/>
           <p:cNvPicPr/>
           <p:nvPr/>
         </p:nvPicPr>
@@ -4654,7 +4658,7 @@
         <p:spPr>
           <a:xfrm>
             <a:off x="6492240" y="2595960"/>
-            <a:ext cx="4663080" cy="2534040"/>
+            <a:ext cx="4662720" cy="2533680"/>
           </a:xfrm>
           <a:prstGeom prst="rect">
             <a:avLst/>
@@ -4696,14 +4700,14 @@
       </p:grpSpPr>
       <p:sp>
         <p:nvSpPr>
-          <p:cNvPr id="75" name="Rectangle 1"/>
+          <p:cNvPr id="74" name="Rectangle 1"/>
           <p:cNvSpPr/>
           <p:nvPr/>
         </p:nvSpPr>
         <p:spPr>
           <a:xfrm>
             <a:off x="0" y="0"/>
-            <a:ext cx="12191760" cy="6857640"/>
+            <a:ext cx="12191400" cy="6857280"/>
           </a:xfrm>
           <a:prstGeom prst="rect">
             <a:avLst/>
@@ -4714,6 +4718,13 @@
           <a:ln>
             <a:noFill/>
           </a:ln>
+          <a:effectLst>
+            <a:outerShdw blurRad="39960" dir="5400000" dist="23040" rotWithShape="0">
+              <a:srgbClr val="000000">
+                <a:alpha val="35000"/>
+              </a:srgbClr>
+            </a:outerShdw>
+          </a:effectLst>
         </p:spPr>
         <p:style>
           <a:lnRef idx="1">
@@ -4730,14 +4741,14 @@
       </p:sp>
       <p:sp>
         <p:nvSpPr>
-          <p:cNvPr id="76" name="Rectangle 2"/>
+          <p:cNvPr id="75" name="Rectangle 2"/>
           <p:cNvSpPr/>
           <p:nvPr/>
         </p:nvSpPr>
         <p:spPr>
           <a:xfrm>
             <a:off x="0" y="0"/>
-            <a:ext cx="12191760" cy="109440"/>
+            <a:ext cx="12191400" cy="109080"/>
           </a:xfrm>
           <a:prstGeom prst="rect">
             <a:avLst/>
@@ -4748,6 +4759,13 @@
           <a:ln>
             <a:noFill/>
           </a:ln>
+          <a:effectLst>
+            <a:outerShdw blurRad="39960" dir="5400000" dist="23040" rotWithShape="0">
+              <a:srgbClr val="000000">
+                <a:alpha val="35000"/>
+              </a:srgbClr>
+            </a:outerShdw>
+          </a:effectLst>
         </p:spPr>
         <p:style>
           <a:lnRef idx="1">
@@ -4764,14 +4782,14 @@
       </p:sp>
       <p:sp>
         <p:nvSpPr>
-          <p:cNvPr id="77" name="TextBox 3"/>
+          <p:cNvPr id="76" name="TextBox 3"/>
           <p:cNvSpPr/>
           <p:nvPr/>
         </p:nvSpPr>
         <p:spPr>
           <a:xfrm>
             <a:off x="411480" y="210240"/>
-            <a:ext cx="594000" cy="272160"/>
+            <a:ext cx="593640" cy="272160"/>
           </a:xfrm>
           <a:prstGeom prst="rect">
             <a:avLst/>
@@ -4804,6 +4822,7 @@
                   <a:srgbClr val="f28e2b"/>
                 </a:solidFill>
                 <a:latin typeface="Arial"/>
+                <a:ea typeface="DejaVu Sans"/>
               </a:rPr>
               <a:t>04</a:t>
             </a:r>
@@ -4815,14 +4834,14 @@
       </p:sp>
       <p:sp>
         <p:nvSpPr>
-          <p:cNvPr id="78" name="TextBox 4"/>
+          <p:cNvPr id="77" name="TextBox 4"/>
           <p:cNvSpPr/>
           <p:nvPr/>
         </p:nvSpPr>
         <p:spPr>
           <a:xfrm>
             <a:off x="841320" y="182880"/>
-            <a:ext cx="8960760" cy="455400"/>
+            <a:ext cx="8960400" cy="455400"/>
           </a:xfrm>
           <a:prstGeom prst="rect">
             <a:avLst/>
@@ -4855,6 +4874,7 @@
                   <a:srgbClr val="0e3865"/>
                 </a:solidFill>
                 <a:latin typeface="Arial"/>
+                <a:ea typeface="DejaVu Sans"/>
               </a:rPr>
               <a:t>Средние оценки сервисов</a:t>
             </a:r>
@@ -4866,14 +4886,14 @@
       </p:sp>
       <p:sp>
         <p:nvSpPr>
-          <p:cNvPr id="79" name="TextBox 5"/>
+          <p:cNvPr id="78" name="TextBox 5"/>
           <p:cNvSpPr/>
           <p:nvPr/>
         </p:nvSpPr>
         <p:spPr>
           <a:xfrm>
             <a:off x="859680" y="576000"/>
-            <a:ext cx="10149480" cy="266040"/>
+            <a:ext cx="10149120" cy="266040"/>
           </a:xfrm>
           <a:prstGeom prst="rect">
             <a:avLst/>
@@ -4906,6 +4926,7 @@
                   <a:srgbClr val="606b7b"/>
                 </a:solidFill>
                 <a:latin typeface="Arial"/>
+                <a:ea typeface="DejaVu Sans"/>
               </a:rPr>
               <a:t>Тепловая карта позволяет увидеть, по каким критериям каждый сервис силён относительно остальных</a:t>
             </a:r>
@@ -4917,14 +4938,14 @@
       </p:sp>
       <p:sp>
         <p:nvSpPr>
-          <p:cNvPr id="80" name="TextBox 7"/>
+          <p:cNvPr id="79" name="TextBox 7"/>
           <p:cNvSpPr/>
           <p:nvPr/>
         </p:nvSpPr>
         <p:spPr>
           <a:xfrm>
             <a:off x="7543800" y="1261800"/>
-            <a:ext cx="3245760" cy="363960"/>
+            <a:ext cx="3245400" cy="363960"/>
           </a:xfrm>
           <a:prstGeom prst="rect">
             <a:avLst/>
@@ -4957,6 +4978,7 @@
                   <a:srgbClr val="0e3865"/>
                 </a:solidFill>
                 <a:latin typeface="Arial"/>
+                <a:ea typeface="DejaVu Sans"/>
               </a:rPr>
               <a:t>Главные наблюдения</a:t>
             </a:r>
@@ -4968,14 +4990,14 @@
       </p:sp>
       <p:sp>
         <p:nvSpPr>
-          <p:cNvPr id="81" name="TextBox 8"/>
+          <p:cNvPr id="80" name="TextBox 8"/>
           <p:cNvSpPr/>
           <p:nvPr/>
         </p:nvSpPr>
         <p:spPr>
           <a:xfrm>
             <a:off x="7571160" y="1700640"/>
-            <a:ext cx="3337200" cy="2049480"/>
+            <a:ext cx="3336840" cy="2049480"/>
           </a:xfrm>
           <a:prstGeom prst="rect">
             <a:avLst/>
@@ -5011,6 +5033,7 @@
                   <a:srgbClr val="1f2937"/>
                 </a:solidFill>
                 <a:latin typeface="Arial"/>
+                <a:ea typeface="DejaVu Sans"/>
               </a:rPr>
               <a:t>Ozon Fresh получает лучшую оценку по цене.</a:t>
             </a:r>
@@ -5034,6 +5057,7 @@
                   <a:srgbClr val="1f2937"/>
                 </a:solidFill>
                 <a:latin typeface="Arial"/>
+                <a:ea typeface="DejaVu Sans"/>
               </a:rPr>
               <a:t>Самокат лидирует по скорости доставки.</a:t>
             </a:r>
@@ -5057,6 +5081,7 @@
                   <a:srgbClr val="1f2937"/>
                 </a:solidFill>
                 <a:latin typeface="Arial"/>
+                <a:ea typeface="DejaVu Sans"/>
               </a:rPr>
               <a:t>Яндекс Еда показывает максимум по общему качеству.</a:t>
             </a:r>
@@ -5080,6 +5105,7 @@
                   <a:srgbClr val="1f2937"/>
                 </a:solidFill>
                 <a:latin typeface="Arial"/>
+                <a:ea typeface="DejaVu Sans"/>
               </a:rPr>
               <a:t>Следовательно, у сервисов разные сильные стороны.</a:t>
             </a:r>
@@ -5091,14 +5117,14 @@
       </p:sp>
       <p:sp>
         <p:nvSpPr>
-          <p:cNvPr id="82" name="Rounded Rectangle 9"/>
+          <p:cNvPr id="81" name="Rounded Rectangle 9"/>
           <p:cNvSpPr/>
           <p:nvPr/>
         </p:nvSpPr>
         <p:spPr>
           <a:xfrm>
             <a:off x="7571160" y="4709160"/>
-            <a:ext cx="3245760" cy="959760"/>
+            <a:ext cx="3245400" cy="959400"/>
           </a:xfrm>
           <a:prstGeom prst="roundRect">
             <a:avLst>
@@ -5113,6 +5139,13 @@
               <a:srgbClr val="e8eff7"/>
             </a:solidFill>
           </a:ln>
+          <a:effectLst>
+            <a:outerShdw blurRad="39960" dir="5400000" dist="23040" rotWithShape="0">
+              <a:srgbClr val="000000">
+                <a:alpha val="35000"/>
+              </a:srgbClr>
+            </a:outerShdw>
+          </a:effectLst>
         </p:spPr>
         <p:style>
           <a:lnRef idx="1">
@@ -5129,14 +5162,14 @@
       </p:sp>
       <p:sp>
         <p:nvSpPr>
-          <p:cNvPr id="83" name="TextBox 10"/>
+          <p:cNvPr id="82" name="TextBox 10"/>
           <p:cNvSpPr/>
           <p:nvPr/>
         </p:nvSpPr>
         <p:spPr>
           <a:xfrm>
             <a:off x="7699320" y="4709160"/>
-            <a:ext cx="2989800" cy="903600"/>
+            <a:ext cx="2989440" cy="903600"/>
           </a:xfrm>
           <a:prstGeom prst="rect">
             <a:avLst/>
@@ -5169,6 +5202,7 @@
                   <a:srgbClr val="0e3865"/>
                 </a:solidFill>
                 <a:latin typeface="Arial"/>
+                <a:ea typeface="DejaVu Sans"/>
               </a:rPr>
               <a:t>Смысл рисунка</a:t>
             </a:r>
@@ -5192,6 +5226,7 @@
                   <a:srgbClr val="1f2937"/>
                 </a:solidFill>
                 <a:latin typeface="Arial"/>
+                <a:ea typeface="DejaVu Sans"/>
               </a:rPr>
               <a:t>Одна итоговая оценка скрывает различия между критериями, поэтому дальше нужен факторный анализ.</a:t>
             </a:r>
@@ -5203,7 +5238,7 @@
       </p:sp>
       <p:pic>
         <p:nvPicPr>
-          <p:cNvPr id="84" name="Picture 11" descr="service_criteria_heatmap_annotated.png"/>
+          <p:cNvPr id="83" name="Picture 11" descr="service_criteria_heatmap_annotated.png"/>
           <p:cNvPicPr/>
           <p:nvPr/>
         </p:nvPicPr>
@@ -5214,7 +5249,7 @@
         <p:spPr>
           <a:xfrm>
             <a:off x="658440" y="1575360"/>
-            <a:ext cx="6629040" cy="3780000"/>
+            <a:ext cx="6628680" cy="3779640"/>
           </a:xfrm>
           <a:prstGeom prst="rect">
             <a:avLst/>
@@ -5256,14 +5291,14 @@
       </p:grpSpPr>
       <p:sp>
         <p:nvSpPr>
-          <p:cNvPr id="85" name="Rectangle 1"/>
+          <p:cNvPr id="84" name="Rectangle 1"/>
           <p:cNvSpPr/>
           <p:nvPr/>
         </p:nvSpPr>
         <p:spPr>
           <a:xfrm>
             <a:off x="0" y="0"/>
-            <a:ext cx="12191760" cy="6857640"/>
+            <a:ext cx="12191400" cy="6857280"/>
           </a:xfrm>
           <a:prstGeom prst="rect">
             <a:avLst/>
@@ -5274,6 +5309,13 @@
           <a:ln>
             <a:noFill/>
           </a:ln>
+          <a:effectLst>
+            <a:outerShdw blurRad="39960" dir="5400000" dist="23040" rotWithShape="0">
+              <a:srgbClr val="000000">
+                <a:alpha val="35000"/>
+              </a:srgbClr>
+            </a:outerShdw>
+          </a:effectLst>
         </p:spPr>
         <p:style>
           <a:lnRef idx="1">
@@ -5290,14 +5332,14 @@
       </p:sp>
       <p:sp>
         <p:nvSpPr>
-          <p:cNvPr id="86" name="Rectangle 2"/>
+          <p:cNvPr id="85" name="Rectangle 2"/>
           <p:cNvSpPr/>
           <p:nvPr/>
         </p:nvSpPr>
         <p:spPr>
           <a:xfrm>
             <a:off x="0" y="0"/>
-            <a:ext cx="12191760" cy="109440"/>
+            <a:ext cx="12191400" cy="109080"/>
           </a:xfrm>
           <a:prstGeom prst="rect">
             <a:avLst/>
@@ -5308,6 +5350,13 @@
           <a:ln>
             <a:noFill/>
           </a:ln>
+          <a:effectLst>
+            <a:outerShdw blurRad="39960" dir="5400000" dist="23040" rotWithShape="0">
+              <a:srgbClr val="000000">
+                <a:alpha val="35000"/>
+              </a:srgbClr>
+            </a:outerShdw>
+          </a:effectLst>
         </p:spPr>
         <p:style>
           <a:lnRef idx="1">
@@ -5324,14 +5373,14 @@
       </p:sp>
       <p:sp>
         <p:nvSpPr>
-          <p:cNvPr id="87" name="TextBox 3"/>
+          <p:cNvPr id="86" name="TextBox 3"/>
           <p:cNvSpPr/>
           <p:nvPr/>
         </p:nvSpPr>
         <p:spPr>
           <a:xfrm>
             <a:off x="411480" y="210240"/>
-            <a:ext cx="594000" cy="272160"/>
+            <a:ext cx="593640" cy="272160"/>
           </a:xfrm>
           <a:prstGeom prst="rect">
             <a:avLst/>
@@ -5364,6 +5413,7 @@
                   <a:srgbClr val="f28e2b"/>
                 </a:solidFill>
                 <a:latin typeface="Arial"/>
+                <a:ea typeface="DejaVu Sans"/>
               </a:rPr>
               <a:t>05</a:t>
             </a:r>
@@ -5375,14 +5425,14 @@
       </p:sp>
       <p:sp>
         <p:nvSpPr>
-          <p:cNvPr id="88" name="TextBox 4"/>
+          <p:cNvPr id="87" name="TextBox 4"/>
           <p:cNvSpPr/>
           <p:nvPr/>
         </p:nvSpPr>
         <p:spPr>
           <a:xfrm>
             <a:off x="841320" y="182880"/>
-            <a:ext cx="8960760" cy="455400"/>
+            <a:ext cx="8960400" cy="455400"/>
           </a:xfrm>
           <a:prstGeom prst="rect">
             <a:avLst/>
@@ -5415,6 +5465,7 @@
                   <a:srgbClr val="0e3865"/>
                 </a:solidFill>
                 <a:latin typeface="Arial"/>
+                <a:ea typeface="DejaVu Sans"/>
               </a:rPr>
               <a:t>Факторный анализ сервисов</a:t>
             </a:r>
@@ -5426,14 +5477,14 @@
       </p:sp>
       <p:sp>
         <p:nvSpPr>
-          <p:cNvPr id="89" name="TextBox 5"/>
+          <p:cNvPr id="88" name="TextBox 5"/>
           <p:cNvSpPr/>
           <p:nvPr/>
         </p:nvSpPr>
         <p:spPr>
           <a:xfrm>
             <a:off x="859680" y="576000"/>
-            <a:ext cx="10149480" cy="266040"/>
+            <a:ext cx="10149120" cy="266040"/>
           </a:xfrm>
           <a:prstGeom prst="rect">
             <a:avLst/>
@@ -5466,6 +5517,7 @@
                   <a:srgbClr val="606b7b"/>
                 </a:solidFill>
                 <a:latin typeface="Arial"/>
+                <a:ea typeface="DejaVu Sans"/>
               </a:rPr>
               <a:t>Разведочная факторная карта: возможные сценарии восприятия сервисов, а не строго доказанные сегменты</a:t>
             </a:r>
@@ -5477,14 +5529,14 @@
       </p:sp>
       <p:sp>
         <p:nvSpPr>
-          <p:cNvPr id="90" name="TextBox 8"/>
+          <p:cNvPr id="89" name="TextBox 8"/>
           <p:cNvSpPr/>
           <p:nvPr/>
         </p:nvSpPr>
         <p:spPr>
           <a:xfrm>
             <a:off x="7013160" y="1500120"/>
-            <a:ext cx="3599640" cy="394560"/>
+            <a:ext cx="3599280" cy="394560"/>
           </a:xfrm>
           <a:prstGeom prst="rect">
             <a:avLst/>
@@ -5517,6 +5569,7 @@
                   <a:srgbClr val="0e3865"/>
                 </a:solidFill>
                 <a:latin typeface="Arial"/>
+                <a:ea typeface="DejaVu Sans"/>
               </a:rPr>
               <a:t>Интерпретация факторов</a:t>
             </a:r>
@@ -5528,14 +5581,14 @@
       </p:sp>
       <p:sp>
         <p:nvSpPr>
-          <p:cNvPr id="91" name="TextBox 9"/>
+          <p:cNvPr id="90" name="TextBox 9"/>
           <p:cNvSpPr/>
           <p:nvPr/>
         </p:nvSpPr>
         <p:spPr>
           <a:xfrm>
             <a:off x="7013160" y="1950120"/>
-            <a:ext cx="3599640" cy="1824120"/>
+            <a:ext cx="3599280" cy="1824120"/>
           </a:xfrm>
           <a:prstGeom prst="rect">
             <a:avLst/>
@@ -5568,6 +5621,7 @@
                   <a:srgbClr val="242834"/>
                 </a:solidFill>
                 <a:latin typeface="Arial"/>
+                <a:ea typeface="DejaVu Sans"/>
               </a:rPr>
               <a:t>F1 связан с Самокатом и Ozon Fresh и отражает практичный сценарий заказа.</a:t>
             </a:r>
@@ -5599,6 +5653,7 @@
                   <a:srgbClr val="242834"/>
                 </a:solidFill>
                 <a:latin typeface="Arial"/>
+                <a:ea typeface="DejaVu Sans"/>
               </a:rPr>
               <a:t>F2 сильнее связан с Купером и Delivery Club и противопоставляется Яндекс Еде.</a:t>
             </a:r>
@@ -5610,14 +5665,14 @@
       </p:sp>
       <p:sp>
         <p:nvSpPr>
-          <p:cNvPr id="92" name="Rounded Rectangle 12"/>
+          <p:cNvPr id="91" name="Rounded Rectangle 12"/>
           <p:cNvSpPr/>
           <p:nvPr/>
         </p:nvSpPr>
         <p:spPr>
           <a:xfrm>
             <a:off x="777240" y="5559480"/>
-            <a:ext cx="10286640" cy="566640"/>
+            <a:ext cx="10286280" cy="566280"/>
           </a:xfrm>
           <a:prstGeom prst="roundRect">
             <a:avLst>
@@ -5632,6 +5687,13 @@
               <a:srgbClr val="d2deec"/>
             </a:solidFill>
           </a:ln>
+          <a:effectLst>
+            <a:outerShdw blurRad="39960" dir="5400000" dist="23040" rotWithShape="0">
+              <a:srgbClr val="000000">
+                <a:alpha val="35000"/>
+              </a:srgbClr>
+            </a:outerShdw>
+          </a:effectLst>
         </p:spPr>
         <p:style>
           <a:lnRef idx="1">
@@ -5648,14 +5710,14 @@
       </p:sp>
       <p:sp>
         <p:nvSpPr>
-          <p:cNvPr id="93" name="TextBox 13"/>
+          <p:cNvPr id="92" name="TextBox 13"/>
           <p:cNvSpPr/>
           <p:nvPr/>
         </p:nvSpPr>
         <p:spPr>
           <a:xfrm>
             <a:off x="960120" y="5559480"/>
-            <a:ext cx="9920880" cy="476280"/>
+            <a:ext cx="9920520" cy="476280"/>
           </a:xfrm>
           <a:prstGeom prst="rect">
             <a:avLst/>
@@ -5688,6 +5750,7 @@
                   <a:srgbClr val="0e3865"/>
                 </a:solidFill>
                 <a:latin typeface="Arial"/>
+                <a:ea typeface="DejaVu Sans"/>
               </a:rPr>
               <a:t>Вывод: сервисы можно условно разнести по разным сценариям использования; интерпретация факторов носит разведочный характер.</a:t>
             </a:r>
@@ -5699,7 +5762,7 @@
       </p:sp>
       <p:pic>
         <p:nvPicPr>
-          <p:cNvPr id="94" name="Picture 14" descr="object_factor_map_annotated.png"/>
+          <p:cNvPr id="93" name="Picture 14" descr="object_factor_map_annotated.png"/>
           <p:cNvPicPr/>
           <p:nvPr/>
         </p:nvPicPr>
@@ -5710,7 +5773,7 @@
         <p:spPr>
           <a:xfrm>
             <a:off x="640080" y="1170360"/>
-            <a:ext cx="5760360" cy="4380120"/>
+            <a:ext cx="5760000" cy="4379760"/>
           </a:xfrm>
           <a:prstGeom prst="rect">
             <a:avLst/>
@@ -5752,14 +5815,14 @@
       </p:grpSpPr>
       <p:sp>
         <p:nvSpPr>
-          <p:cNvPr id="95" name="Rectangle 1"/>
+          <p:cNvPr id="94" name="Rectangle 1"/>
           <p:cNvSpPr/>
           <p:nvPr/>
         </p:nvSpPr>
         <p:spPr>
           <a:xfrm>
             <a:off x="0" y="0"/>
-            <a:ext cx="12191760" cy="6857640"/>
+            <a:ext cx="12191400" cy="6857280"/>
           </a:xfrm>
           <a:prstGeom prst="rect">
             <a:avLst/>
@@ -5770,6 +5833,13 @@
           <a:ln>
             <a:noFill/>
           </a:ln>
+          <a:effectLst>
+            <a:outerShdw blurRad="39960" dir="5400000" dist="23040" rotWithShape="0">
+              <a:srgbClr val="000000">
+                <a:alpha val="35000"/>
+              </a:srgbClr>
+            </a:outerShdw>
+          </a:effectLst>
         </p:spPr>
         <p:style>
           <a:lnRef idx="1">
@@ -5786,14 +5856,14 @@
       </p:sp>
       <p:sp>
         <p:nvSpPr>
-          <p:cNvPr id="96" name="Rectangle 2"/>
+          <p:cNvPr id="95" name="Rectangle 2"/>
           <p:cNvSpPr/>
           <p:nvPr/>
         </p:nvSpPr>
         <p:spPr>
           <a:xfrm>
             <a:off x="0" y="0"/>
-            <a:ext cx="12191760" cy="109440"/>
+            <a:ext cx="12191400" cy="109080"/>
           </a:xfrm>
           <a:prstGeom prst="rect">
             <a:avLst/>
@@ -5804,6 +5874,13 @@
           <a:ln>
             <a:noFill/>
           </a:ln>
+          <a:effectLst>
+            <a:outerShdw blurRad="39960" dir="5400000" dist="23040" rotWithShape="0">
+              <a:srgbClr val="000000">
+                <a:alpha val="35000"/>
+              </a:srgbClr>
+            </a:outerShdw>
+          </a:effectLst>
         </p:spPr>
         <p:style>
           <a:lnRef idx="1">
@@ -5820,14 +5897,14 @@
       </p:sp>
       <p:sp>
         <p:nvSpPr>
-          <p:cNvPr id="97" name="TextBox 3"/>
+          <p:cNvPr id="96" name="TextBox 3"/>
           <p:cNvSpPr/>
           <p:nvPr/>
         </p:nvSpPr>
         <p:spPr>
           <a:xfrm>
             <a:off x="411480" y="210240"/>
-            <a:ext cx="594000" cy="272160"/>
+            <a:ext cx="593640" cy="272160"/>
           </a:xfrm>
           <a:prstGeom prst="rect">
             <a:avLst/>
@@ -5860,6 +5937,7 @@
                   <a:srgbClr val="f28e2b"/>
                 </a:solidFill>
                 <a:latin typeface="Arial"/>
+                <a:ea typeface="DejaVu Sans"/>
               </a:rPr>
               <a:t>06</a:t>
             </a:r>
@@ -5871,14 +5949,14 @@
       </p:sp>
       <p:sp>
         <p:nvSpPr>
-          <p:cNvPr id="98" name="TextBox 4"/>
+          <p:cNvPr id="97" name="TextBox 4"/>
           <p:cNvSpPr/>
           <p:nvPr/>
         </p:nvSpPr>
         <p:spPr>
           <a:xfrm>
             <a:off x="841320" y="182880"/>
-            <a:ext cx="8960760" cy="455400"/>
+            <a:ext cx="8960400" cy="455400"/>
           </a:xfrm>
           <a:prstGeom prst="rect">
             <a:avLst/>
@@ -5911,6 +5989,7 @@
                   <a:srgbClr val="0e3865"/>
                 </a:solidFill>
                 <a:latin typeface="Arial"/>
+                <a:ea typeface="DejaVu Sans"/>
               </a:rPr>
               <a:t>Факторный анализ характеристик экспертов</a:t>
             </a:r>
@@ -5922,14 +6001,14 @@
       </p:sp>
       <p:sp>
         <p:nvSpPr>
-          <p:cNvPr id="99" name="TextBox 5"/>
+          <p:cNvPr id="98" name="TextBox 5"/>
           <p:cNvSpPr/>
           <p:nvPr/>
         </p:nvSpPr>
         <p:spPr>
           <a:xfrm>
             <a:off x="859680" y="576000"/>
-            <a:ext cx="10149480" cy="266040"/>
+            <a:ext cx="10149120" cy="266040"/>
           </a:xfrm>
           <a:prstGeom prst="rect">
             <a:avLst/>
@@ -5962,6 +6041,7 @@
                   <a:srgbClr val="606b7b"/>
                 </a:solidFill>
                 <a:latin typeface="Arial"/>
+                <a:ea typeface="DejaVu Sans"/>
               </a:rPr>
               <a:t>Важно не только то, каковы сервисы, но и кто именно их оценивает</a:t>
             </a:r>
@@ -5973,14 +6053,14 @@
       </p:sp>
       <p:sp>
         <p:nvSpPr>
-          <p:cNvPr id="100" name="TextBox 7"/>
+          <p:cNvPr id="99" name="TextBox 7"/>
           <p:cNvSpPr/>
           <p:nvPr/>
         </p:nvSpPr>
         <p:spPr>
           <a:xfrm>
             <a:off x="8046720" y="1234440"/>
-            <a:ext cx="2742840" cy="363960"/>
+            <a:ext cx="2742480" cy="363960"/>
           </a:xfrm>
           <a:prstGeom prst="rect">
             <a:avLst/>
@@ -6013,6 +6093,7 @@
                   <a:srgbClr val="0e3865"/>
                 </a:solidFill>
                 <a:latin typeface="Arial"/>
+                <a:ea typeface="DejaVu Sans"/>
               </a:rPr>
               <a:t>Что влияет сильнее</a:t>
             </a:r>
@@ -6024,14 +6105,14 @@
       </p:sp>
       <p:sp>
         <p:nvSpPr>
-          <p:cNvPr id="101" name="TextBox 8"/>
+          <p:cNvPr id="100" name="TextBox 8"/>
           <p:cNvSpPr/>
           <p:nvPr/>
         </p:nvSpPr>
         <p:spPr>
           <a:xfrm>
             <a:off x="8065080" y="1664280"/>
-            <a:ext cx="2907360" cy="2012040"/>
+            <a:ext cx="2907000" cy="2012040"/>
           </a:xfrm>
           <a:prstGeom prst="rect">
             <a:avLst/>
@@ -6067,6 +6148,7 @@
                   <a:srgbClr val="1f2937"/>
                 </a:solidFill>
                 <a:latin typeface="Arial"/>
+                <a:ea typeface="DejaVu Sans"/>
               </a:rPr>
               <a:t>F1: вовлечённость в доставку — 30,2%.</a:t>
             </a:r>
@@ -6090,6 +6172,7 @@
                   <a:srgbClr val="1f2937"/>
                 </a:solidFill>
                 <a:latin typeface="Arial"/>
+                <a:ea typeface="DejaVu Sans"/>
               </a:rPr>
               <a:t>F2: скорость и ассортимент — 13,1%.</a:t>
             </a:r>
@@ -6113,6 +6196,7 @@
                   <a:srgbClr val="1f2937"/>
                 </a:solidFill>
                 <a:latin typeface="Arial"/>
+                <a:ea typeface="DejaVu Sans"/>
               </a:rPr>
               <a:t>F3: цена, скидки и удобство — 12,6%.</a:t>
             </a:r>
@@ -6136,6 +6220,7 @@
                   <a:srgbClr val="1f2937"/>
                 </a:solidFill>
                 <a:latin typeface="Arial"/>
+                <a:ea typeface="DejaVu Sans"/>
               </a:rPr>
               <a:t>F4: точность времени и поддержка — 9,0%.</a:t>
             </a:r>
@@ -6147,14 +6232,14 @@
       </p:sp>
       <p:sp>
         <p:nvSpPr>
-          <p:cNvPr id="102" name="Rounded Rectangle 9"/>
+          <p:cNvPr id="101" name="Rounded Rectangle 9"/>
           <p:cNvSpPr/>
           <p:nvPr/>
         </p:nvSpPr>
         <p:spPr>
           <a:xfrm>
             <a:off x="8046720" y="4370760"/>
-            <a:ext cx="2834280" cy="1801440"/>
+            <a:ext cx="2833920" cy="1801080"/>
           </a:xfrm>
           <a:prstGeom prst="roundRect">
             <a:avLst>
@@ -6169,6 +6254,13 @@
               <a:srgbClr val="e8eff7"/>
             </a:solidFill>
           </a:ln>
+          <a:effectLst>
+            <a:outerShdw blurRad="39960" dir="5400000" dist="23040" rotWithShape="0">
+              <a:srgbClr val="000000">
+                <a:alpha val="35000"/>
+              </a:srgbClr>
+            </a:outerShdw>
+          </a:effectLst>
         </p:spPr>
         <p:style>
           <a:lnRef idx="1">
@@ -6185,14 +6277,14 @@
       </p:sp>
       <p:sp>
         <p:nvSpPr>
-          <p:cNvPr id="103" name="TextBox 10"/>
+          <p:cNvPr id="102" name="TextBox 10"/>
           <p:cNvSpPr/>
           <p:nvPr/>
         </p:nvSpPr>
         <p:spPr>
           <a:xfrm>
             <a:off x="8183520" y="4572000"/>
-            <a:ext cx="2697480" cy="1456560"/>
+            <a:ext cx="2697120" cy="1456560"/>
           </a:xfrm>
           <a:prstGeom prst="rect">
             <a:avLst/>
@@ -6225,6 +6317,7 @@
                   <a:srgbClr val="0e3865"/>
                 </a:solidFill>
                 <a:latin typeface="Arial"/>
+                <a:ea typeface="DejaVu Sans"/>
               </a:rPr>
               <a:t>Ключевой вывод</a:t>
             </a:r>
@@ -6248,6 +6341,7 @@
                   <a:srgbClr val="1f2937"/>
                 </a:solidFill>
                 <a:latin typeface="Arial"/>
+                <a:ea typeface="DejaVu Sans"/>
               </a:rPr>
               <a:t>Самый сильный фактор — вовлечённость в доставку. Значит, различия в ответах в первую очередь задаются частотой заказов, расходами и пользовательским опытом.</a:t>
             </a:r>
@@ -6259,7 +6353,7 @@
       </p:sp>
       <p:pic>
         <p:nvPicPr>
-          <p:cNvPr id="104" name="Picture 11" descr="expert_factor_top_loadings.png"/>
+          <p:cNvPr id="103" name="Picture 11" descr="expert_factor_top_loadings.png"/>
           <p:cNvPicPr/>
           <p:nvPr/>
         </p:nvPicPr>
@@ -6270,7 +6364,7 @@
         <p:spPr>
           <a:xfrm>
             <a:off x="617040" y="1024200"/>
-            <a:ext cx="7224120" cy="4983120"/>
+            <a:ext cx="7223760" cy="4982760"/>
           </a:xfrm>
           <a:prstGeom prst="rect">
             <a:avLst/>
@@ -6312,14 +6406,14 @@
       </p:grpSpPr>
       <p:sp>
         <p:nvSpPr>
-          <p:cNvPr id="105" name="Rectangle 1"/>
+          <p:cNvPr id="104" name="Rectangle 1"/>
           <p:cNvSpPr/>
           <p:nvPr/>
         </p:nvSpPr>
         <p:spPr>
           <a:xfrm>
             <a:off x="0" y="0"/>
-            <a:ext cx="12191760" cy="6857640"/>
+            <a:ext cx="12191400" cy="6857280"/>
           </a:xfrm>
           <a:prstGeom prst="rect">
             <a:avLst/>
@@ -6330,6 +6424,13 @@
           <a:ln>
             <a:noFill/>
           </a:ln>
+          <a:effectLst>
+            <a:outerShdw blurRad="39960" dir="5400000" dist="23040" rotWithShape="0">
+              <a:srgbClr val="000000">
+                <a:alpha val="35000"/>
+              </a:srgbClr>
+            </a:outerShdw>
+          </a:effectLst>
         </p:spPr>
         <p:style>
           <a:lnRef idx="1">
@@ -6346,14 +6447,14 @@
       </p:sp>
       <p:sp>
         <p:nvSpPr>
-          <p:cNvPr id="106" name="Rectangle 2"/>
+          <p:cNvPr id="105" name="Rectangle 2"/>
           <p:cNvSpPr/>
           <p:nvPr/>
         </p:nvSpPr>
         <p:spPr>
           <a:xfrm>
             <a:off x="0" y="0"/>
-            <a:ext cx="12191760" cy="109440"/>
+            <a:ext cx="12191400" cy="109080"/>
           </a:xfrm>
           <a:prstGeom prst="rect">
             <a:avLst/>
@@ -6364,6 +6465,13 @@
           <a:ln>
             <a:noFill/>
           </a:ln>
+          <a:effectLst>
+            <a:outerShdw blurRad="39960" dir="5400000" dist="23040" rotWithShape="0">
+              <a:srgbClr val="000000">
+                <a:alpha val="35000"/>
+              </a:srgbClr>
+            </a:outerShdw>
+          </a:effectLst>
         </p:spPr>
         <p:style>
           <a:lnRef idx="1">
@@ -6380,14 +6488,14 @@
       </p:sp>
       <p:sp>
         <p:nvSpPr>
-          <p:cNvPr id="107" name="TextBox 3"/>
+          <p:cNvPr id="106" name="TextBox 3"/>
           <p:cNvSpPr/>
           <p:nvPr/>
         </p:nvSpPr>
         <p:spPr>
           <a:xfrm>
             <a:off x="411480" y="210240"/>
-            <a:ext cx="594000" cy="272160"/>
+            <a:ext cx="593640" cy="272160"/>
           </a:xfrm>
           <a:prstGeom prst="rect">
             <a:avLst/>
@@ -6420,6 +6528,7 @@
                   <a:srgbClr val="f28e2b"/>
                 </a:solidFill>
                 <a:latin typeface="Arial"/>
+                <a:ea typeface="DejaVu Sans"/>
               </a:rPr>
               <a:t>07</a:t>
             </a:r>
@@ -6431,14 +6540,14 @@
       </p:sp>
       <p:sp>
         <p:nvSpPr>
-          <p:cNvPr id="108" name="TextBox 4"/>
+          <p:cNvPr id="107" name="TextBox 4"/>
           <p:cNvSpPr/>
           <p:nvPr/>
         </p:nvSpPr>
         <p:spPr>
           <a:xfrm>
             <a:off x="841320" y="182880"/>
-            <a:ext cx="8960760" cy="455400"/>
+            <a:ext cx="8960400" cy="455400"/>
           </a:xfrm>
           <a:prstGeom prst="rect">
             <a:avLst/>
@@ -6471,6 +6580,7 @@
                   <a:srgbClr val="0e3865"/>
                 </a:solidFill>
                 <a:latin typeface="Arial"/>
+                <a:ea typeface="DejaVu Sans"/>
               </a:rPr>
               <a:t>Согласованность экспертных оценок</a:t>
             </a:r>
@@ -6482,14 +6592,14 @@
       </p:sp>
       <p:sp>
         <p:nvSpPr>
-          <p:cNvPr id="109" name="TextBox 5"/>
+          <p:cNvPr id="108" name="TextBox 5"/>
           <p:cNvSpPr/>
           <p:nvPr/>
         </p:nvSpPr>
         <p:spPr>
           <a:xfrm>
             <a:off x="859680" y="576000"/>
-            <a:ext cx="10149480" cy="266040"/>
+            <a:ext cx="10149120" cy="266040"/>
           </a:xfrm>
           <a:prstGeom prst="rect">
             <a:avLst/>
@@ -6522,6 +6632,7 @@
                   <a:srgbClr val="606b7b"/>
                 </a:solidFill>
                 <a:latin typeface="Arial"/>
+                <a:ea typeface="DejaVu Sans"/>
               </a:rPr>
               <a:t>Проверяем, можно ли говорить о едином мнении группы</a:t>
             </a:r>
@@ -6533,14 +6644,14 @@
       </p:sp>
       <p:sp>
         <p:nvSpPr>
-          <p:cNvPr id="110" name="TextBox 6"/>
+          <p:cNvPr id="109" name="TextBox 6"/>
           <p:cNvSpPr/>
           <p:nvPr/>
         </p:nvSpPr>
         <p:spPr>
           <a:xfrm>
             <a:off x="822960" y="1097280"/>
-            <a:ext cx="1462680" cy="424800"/>
+            <a:ext cx="1462320" cy="424800"/>
           </a:xfrm>
           <a:prstGeom prst="rect">
             <a:avLst/>
@@ -6573,6 +6684,7 @@
                   <a:srgbClr val="0e3865"/>
                 </a:solidFill>
                 <a:latin typeface="Arial"/>
+                <a:ea typeface="DejaVu Sans"/>
               </a:rPr>
               <a:t>χ² = 33,11</a:t>
             </a:r>
@@ -6584,14 +6696,14 @@
       </p:sp>
       <p:sp>
         <p:nvSpPr>
-          <p:cNvPr id="111" name="TextBox 7"/>
+          <p:cNvPr id="110" name="TextBox 7"/>
           <p:cNvSpPr/>
           <p:nvPr/>
         </p:nvSpPr>
         <p:spPr>
           <a:xfrm>
             <a:off x="795600" y="1435680"/>
-            <a:ext cx="1517400" cy="379080"/>
+            <a:ext cx="1517040" cy="379080"/>
           </a:xfrm>
           <a:prstGeom prst="rect">
             <a:avLst/>
@@ -6624,6 +6736,7 @@
                   <a:srgbClr val="606b7b"/>
                 </a:solidFill>
                 <a:latin typeface="Arial"/>
+                <a:ea typeface="DejaVu Sans"/>
               </a:rPr>
               <a:t>критерий</a:t>
             </a:r>
@@ -6636,6 +6749,7 @@
                   <a:srgbClr val="606b7b"/>
                 </a:solidFill>
                 <a:latin typeface="Arial"/>
+                <a:ea typeface="DejaVu Sans"/>
               </a:rPr>
               <a:t>Фридмана</a:t>
             </a:r>
@@ -6647,14 +6761,14 @@
       </p:sp>
       <p:sp>
         <p:nvSpPr>
-          <p:cNvPr id="112" name="TextBox 8"/>
+          <p:cNvPr id="111" name="TextBox 8"/>
           <p:cNvSpPr/>
           <p:nvPr/>
         </p:nvSpPr>
         <p:spPr>
           <a:xfrm>
             <a:off x="2651760" y="1097280"/>
-            <a:ext cx="1462680" cy="424800"/>
+            <a:ext cx="1462320" cy="424800"/>
           </a:xfrm>
           <a:prstGeom prst="rect">
             <a:avLst/>
@@ -6687,6 +6801,7 @@
                   <a:srgbClr val="f28e2b"/>
                 </a:solidFill>
                 <a:latin typeface="Arial"/>
+                <a:ea typeface="DejaVu Sans"/>
               </a:rPr>
               <a:t>p &lt; 0,001</a:t>
             </a:r>
@@ -6698,14 +6813,14 @@
       </p:sp>
       <p:sp>
         <p:nvSpPr>
-          <p:cNvPr id="113" name="TextBox 9"/>
+          <p:cNvPr id="112" name="TextBox 9"/>
           <p:cNvSpPr/>
           <p:nvPr/>
         </p:nvSpPr>
         <p:spPr>
           <a:xfrm>
             <a:off x="2624400" y="1435680"/>
-            <a:ext cx="1517400" cy="379080"/>
+            <a:ext cx="1517040" cy="379080"/>
           </a:xfrm>
           <a:prstGeom prst="rect">
             <a:avLst/>
@@ -6738,6 +6853,7 @@
                   <a:srgbClr val="606b7b"/>
                 </a:solidFill>
                 <a:latin typeface="Arial"/>
+                <a:ea typeface="DejaVu Sans"/>
               </a:rPr>
               <a:t>различия</a:t>
             </a:r>
@@ -6750,6 +6866,7 @@
                   <a:srgbClr val="606b7b"/>
                 </a:solidFill>
                 <a:latin typeface="Arial"/>
+                <a:ea typeface="DejaVu Sans"/>
               </a:rPr>
               <a:t>значимы</a:t>
             </a:r>
@@ -6761,14 +6878,14 @@
       </p:sp>
       <p:sp>
         <p:nvSpPr>
-          <p:cNvPr id="114" name="TextBox 10"/>
+          <p:cNvPr id="113" name="TextBox 10"/>
           <p:cNvSpPr/>
           <p:nvPr/>
         </p:nvSpPr>
         <p:spPr>
           <a:xfrm>
             <a:off x="4480560" y="1097280"/>
-            <a:ext cx="1462680" cy="424800"/>
+            <a:ext cx="1462320" cy="424800"/>
           </a:xfrm>
           <a:prstGeom prst="rect">
             <a:avLst/>
@@ -6801,6 +6918,7 @@
                   <a:srgbClr val="2c5aa0"/>
                 </a:solidFill>
                 <a:latin typeface="Arial"/>
+                <a:ea typeface="DejaVu Sans"/>
               </a:rPr>
               <a:t>W = 0,138</a:t>
             </a:r>
@@ -6812,14 +6930,14 @@
       </p:sp>
       <p:sp>
         <p:nvSpPr>
-          <p:cNvPr id="115" name="TextBox 11"/>
+          <p:cNvPr id="114" name="TextBox 11"/>
           <p:cNvSpPr/>
           <p:nvPr/>
         </p:nvSpPr>
         <p:spPr>
           <a:xfrm>
             <a:off x="4453200" y="1435680"/>
-            <a:ext cx="1517400" cy="379080"/>
+            <a:ext cx="1517040" cy="379080"/>
           </a:xfrm>
           <a:prstGeom prst="rect">
             <a:avLst/>
@@ -6852,6 +6970,7 @@
                   <a:srgbClr val="606b7b"/>
                 </a:solidFill>
                 <a:latin typeface="Arial"/>
+                <a:ea typeface="DejaVu Sans"/>
               </a:rPr>
               <a:t>конкордация</a:t>
             </a:r>
@@ -6864,6 +6983,7 @@
                   <a:srgbClr val="606b7b"/>
                 </a:solidFill>
                 <a:latin typeface="Arial"/>
+                <a:ea typeface="DejaVu Sans"/>
               </a:rPr>
               <a:t>в полной выборке</a:t>
             </a:r>
@@ -6875,14 +6995,14 @@
       </p:sp>
       <p:sp>
         <p:nvSpPr>
-          <p:cNvPr id="116" name="TextBox 12"/>
+          <p:cNvPr id="115" name="TextBox 12"/>
           <p:cNvSpPr/>
           <p:nvPr/>
         </p:nvSpPr>
         <p:spPr>
           <a:xfrm>
             <a:off x="6492240" y="1097280"/>
-            <a:ext cx="1462680" cy="424800"/>
+            <a:ext cx="1462320" cy="424800"/>
           </a:xfrm>
           <a:prstGeom prst="rect">
             <a:avLst/>
@@ -6915,6 +7035,7 @@
                   <a:srgbClr val="43925f"/>
                 </a:solidFill>
                 <a:latin typeface="Arial"/>
+                <a:ea typeface="DejaVu Sans"/>
               </a:rPr>
               <a:t>W = 0,132</a:t>
             </a:r>
@@ -6926,14 +7047,14 @@
       </p:sp>
       <p:sp>
         <p:nvSpPr>
-          <p:cNvPr id="117" name="TextBox 13"/>
+          <p:cNvPr id="116" name="TextBox 13"/>
           <p:cNvSpPr/>
           <p:nvPr/>
         </p:nvSpPr>
         <p:spPr>
           <a:xfrm>
             <a:off x="6464880" y="1435680"/>
-            <a:ext cx="1517400" cy="379080"/>
+            <a:ext cx="1517040" cy="379080"/>
           </a:xfrm>
           <a:prstGeom prst="rect">
             <a:avLst/>
@@ -6966,6 +7087,7 @@
                   <a:srgbClr val="606b7b"/>
                 </a:solidFill>
                 <a:latin typeface="Arial"/>
+                <a:ea typeface="DejaVu Sans"/>
               </a:rPr>
               <a:t>после проверки</a:t>
             </a:r>
@@ -6978,6 +7100,7 @@
                   <a:srgbClr val="606b7b"/>
                 </a:solidFill>
                 <a:latin typeface="Arial"/>
+                <a:ea typeface="DejaVu Sans"/>
               </a:rPr>
               <a:t>устойчивости</a:t>
             </a:r>
@@ -6989,14 +7112,14 @@
       </p:sp>
       <p:sp>
         <p:nvSpPr>
-          <p:cNvPr id="118" name="TextBox 15"/>
+          <p:cNvPr id="117" name="TextBox 15"/>
           <p:cNvSpPr/>
           <p:nvPr/>
         </p:nvSpPr>
         <p:spPr>
           <a:xfrm>
             <a:off x="6903720" y="2194560"/>
-            <a:ext cx="3657240" cy="363960"/>
+            <a:ext cx="3656880" cy="363960"/>
           </a:xfrm>
           <a:prstGeom prst="rect">
             <a:avLst/>
@@ -7029,6 +7152,7 @@
                   <a:srgbClr val="0e3865"/>
                 </a:solidFill>
                 <a:latin typeface="Arial"/>
+                <a:ea typeface="DejaVu Sans"/>
               </a:rPr>
               <a:t>Что это означает</a:t>
             </a:r>
@@ -7040,14 +7164,14 @@
       </p:sp>
       <p:sp>
         <p:nvSpPr>
-          <p:cNvPr id="119" name="TextBox 16"/>
+          <p:cNvPr id="118" name="TextBox 16"/>
           <p:cNvSpPr/>
           <p:nvPr/>
         </p:nvSpPr>
         <p:spPr>
           <a:xfrm>
             <a:off x="6903720" y="2633400"/>
-            <a:ext cx="3748680" cy="1900800"/>
+            <a:ext cx="3748320" cy="1900800"/>
           </a:xfrm>
           <a:prstGeom prst="rect">
             <a:avLst/>
@@ -7080,6 +7204,7 @@
                   <a:srgbClr val="242834"/>
                 </a:solidFill>
                 <a:latin typeface="Arial"/>
+                <a:ea typeface="DejaVu Sans"/>
               </a:rPr>
               <a:t>Сервисы различаются статистически значимо.</a:t>
             </a:r>
@@ -7100,6 +7225,7 @@
                   <a:srgbClr val="242834"/>
                 </a:solidFill>
                 <a:latin typeface="Arial"/>
+                <a:ea typeface="DejaVu Sans"/>
               </a:rPr>
               <a:t>Но коэффициент W невысок, поэтому полного единодушия нет.</a:t>
             </a:r>
@@ -7120,6 +7246,7 @@
                   <a:srgbClr val="242834"/>
                 </a:solidFill>
                 <a:latin typeface="Arial"/>
+                <a:ea typeface="DejaVu Sans"/>
               </a:rPr>
               <a:t>Пост-хок Уилкоксон + Холм: Самокат значимо выше Delivery Club, Купера и Ozon Fresh.</a:t>
             </a:r>
@@ -7140,6 +7267,7 @@
                   <a:srgbClr val="242834"/>
                 </a:solidFill>
                 <a:latin typeface="Arial"/>
+                <a:ea typeface="DejaVu Sans"/>
               </a:rPr>
               <a:t>Отличие Самоката от Яндекс Еды статистически не подтверждается.</a:t>
             </a:r>
@@ -7151,14 +7279,14 @@
       </p:sp>
       <p:sp>
         <p:nvSpPr>
-          <p:cNvPr id="120" name="Rounded Rectangle 17"/>
+          <p:cNvPr id="119" name="Rounded Rectangle 17"/>
           <p:cNvSpPr/>
           <p:nvPr/>
         </p:nvSpPr>
         <p:spPr>
           <a:xfrm>
             <a:off x="6903720" y="4938120"/>
-            <a:ext cx="3702960" cy="776880"/>
+            <a:ext cx="3702600" cy="776520"/>
           </a:xfrm>
           <a:prstGeom prst="roundRect">
             <a:avLst>
@@ -7173,6 +7301,13 @@
               <a:srgbClr val="e8eff7"/>
             </a:solidFill>
           </a:ln>
+          <a:effectLst>
+            <a:outerShdw blurRad="39960" dir="5400000" dist="23040" rotWithShape="0">
+              <a:srgbClr val="000000">
+                <a:alpha val="35000"/>
+              </a:srgbClr>
+            </a:outerShdw>
+          </a:effectLst>
         </p:spPr>
         <p:style>
           <a:lnRef idx="1">
@@ -7189,14 +7324,14 @@
       </p:sp>
       <p:sp>
         <p:nvSpPr>
-          <p:cNvPr id="121" name="TextBox 18"/>
+          <p:cNvPr id="120" name="TextBox 18"/>
           <p:cNvSpPr/>
           <p:nvPr/>
         </p:nvSpPr>
         <p:spPr>
           <a:xfrm>
             <a:off x="6903720" y="5029200"/>
-            <a:ext cx="3447000" cy="683640"/>
+            <a:ext cx="3446640" cy="683640"/>
           </a:xfrm>
           <a:prstGeom prst="rect">
             <a:avLst/>
@@ -7229,6 +7364,7 @@
                   <a:srgbClr val="242834"/>
                 </a:solidFill>
                 <a:latin typeface="Arial"/>
+                <a:ea typeface="DejaVu Sans"/>
               </a:rPr>
               <a:t>Вывод</a:t>
             </a:r>
@@ -7249,6 +7385,7 @@
                   <a:srgbClr val="242834"/>
                 </a:solidFill>
                 <a:latin typeface="Arial"/>
+                <a:ea typeface="DejaVu Sans"/>
               </a:rPr>
               <a:t>Рейтинг — усреднённая тенденция, а не полный экспертный консенсус.</a:t>
             </a:r>
@@ -7260,7 +7397,7 @@
       </p:sp>
       <p:pic>
         <p:nvPicPr>
-          <p:cNvPr id="122" name="Picture 19" descr="mean_ranks_bar.png"/>
+          <p:cNvPr id="121" name="Picture 19" descr="mean_ranks_bar.png"/>
           <p:cNvPicPr/>
           <p:nvPr/>
         </p:nvPicPr>
@@ -7271,7 +7408,7 @@
         <p:spPr>
           <a:xfrm>
             <a:off x="749880" y="2379240"/>
-            <a:ext cx="5851800" cy="3059280"/>
+            <a:ext cx="5851440" cy="3058920"/>
           </a:xfrm>
           <a:prstGeom prst="rect">
             <a:avLst/>
@@ -7313,14 +7450,14 @@
       </p:grpSpPr>
       <p:sp>
         <p:nvSpPr>
-          <p:cNvPr id="123" name="Rectangle 1"/>
+          <p:cNvPr id="122" name="Rectangle 1"/>
           <p:cNvSpPr/>
           <p:nvPr/>
         </p:nvSpPr>
         <p:spPr>
           <a:xfrm>
             <a:off x="0" y="0"/>
-            <a:ext cx="12191760" cy="6857640"/>
+            <a:ext cx="12191400" cy="6857280"/>
           </a:xfrm>
           <a:prstGeom prst="rect">
             <a:avLst/>
@@ -7331,6 +7468,13 @@
           <a:ln>
             <a:noFill/>
           </a:ln>
+          <a:effectLst>
+            <a:outerShdw blurRad="39960" dir="5400000" dist="23040" rotWithShape="0">
+              <a:srgbClr val="000000">
+                <a:alpha val="35000"/>
+              </a:srgbClr>
+            </a:outerShdw>
+          </a:effectLst>
         </p:spPr>
         <p:style>
           <a:lnRef idx="1">
@@ -7347,14 +7491,14 @@
       </p:sp>
       <p:sp>
         <p:nvSpPr>
-          <p:cNvPr id="124" name="Rectangle 2"/>
+          <p:cNvPr id="123" name="Rectangle 2"/>
           <p:cNvSpPr/>
           <p:nvPr/>
         </p:nvSpPr>
         <p:spPr>
           <a:xfrm>
             <a:off x="0" y="0"/>
-            <a:ext cx="12191760" cy="109440"/>
+            <a:ext cx="12191400" cy="109080"/>
           </a:xfrm>
           <a:prstGeom prst="rect">
             <a:avLst/>
@@ -7365,6 +7509,13 @@
           <a:ln>
             <a:noFill/>
           </a:ln>
+          <a:effectLst>
+            <a:outerShdw blurRad="39960" dir="5400000" dist="23040" rotWithShape="0">
+              <a:srgbClr val="000000">
+                <a:alpha val="35000"/>
+              </a:srgbClr>
+            </a:outerShdw>
+          </a:effectLst>
         </p:spPr>
         <p:style>
           <a:lnRef idx="1">
@@ -7381,14 +7532,14 @@
       </p:sp>
       <p:sp>
         <p:nvSpPr>
-          <p:cNvPr id="125" name="TextBox 3"/>
+          <p:cNvPr id="124" name="TextBox 3"/>
           <p:cNvSpPr/>
           <p:nvPr/>
         </p:nvSpPr>
         <p:spPr>
           <a:xfrm>
             <a:off x="411480" y="210240"/>
-            <a:ext cx="594000" cy="272160"/>
+            <a:ext cx="593640" cy="272160"/>
           </a:xfrm>
           <a:prstGeom prst="rect">
             <a:avLst/>
@@ -7421,6 +7572,7 @@
                   <a:srgbClr val="f28e2b"/>
                 </a:solidFill>
                 <a:latin typeface="Arial"/>
+                <a:ea typeface="DejaVu Sans"/>
               </a:rPr>
               <a:t>08</a:t>
             </a:r>
@@ -7432,14 +7584,14 @@
       </p:sp>
       <p:sp>
         <p:nvSpPr>
-          <p:cNvPr id="126" name="TextBox 4"/>
+          <p:cNvPr id="125" name="TextBox 4"/>
           <p:cNvSpPr/>
           <p:nvPr/>
         </p:nvSpPr>
         <p:spPr>
           <a:xfrm>
             <a:off x="841320" y="182880"/>
-            <a:ext cx="8960760" cy="455400"/>
+            <a:ext cx="8960400" cy="455400"/>
           </a:xfrm>
           <a:prstGeom prst="rect">
             <a:avLst/>
@@ -7472,6 +7624,7 @@
                   <a:srgbClr val="0e3865"/>
                 </a:solidFill>
                 <a:latin typeface="Arial"/>
+                <a:ea typeface="DejaVu Sans"/>
               </a:rPr>
               <a:t>Регрессионная модель: постановка задачи</a:t>
             </a:r>
@@ -7483,14 +7636,14 @@
       </p:sp>
       <p:sp>
         <p:nvSpPr>
-          <p:cNvPr id="127" name="TextBox 5"/>
+          <p:cNvPr id="126" name="TextBox 5"/>
           <p:cNvSpPr/>
           <p:nvPr/>
         </p:nvSpPr>
         <p:spPr>
           <a:xfrm>
             <a:off x="859680" y="576000"/>
-            <a:ext cx="10149480" cy="266040"/>
+            <a:ext cx="10149120" cy="266040"/>
           </a:xfrm>
           <a:prstGeom prst="rect">
             <a:avLst/>
@@ -7523,6 +7676,7 @@
                   <a:srgbClr val="606b7b"/>
                 </a:solidFill>
                 <a:latin typeface="Arial"/>
+                <a:ea typeface="DejaVu Sans"/>
               </a:rPr>
               <a:t>Важно явно показать целевую переменную, источник данных и проверку качества модели</a:t>
             </a:r>
@@ -7534,14 +7688,14 @@
       </p:sp>
       <p:sp>
         <p:nvSpPr>
-          <p:cNvPr id="128" name="Rounded Rectangle 6"/>
+          <p:cNvPr id="127" name="Rounded Rectangle 6"/>
           <p:cNvSpPr/>
           <p:nvPr/>
         </p:nvSpPr>
         <p:spPr>
           <a:xfrm>
             <a:off x="731520" y="1115640"/>
-            <a:ext cx="3291480" cy="1325520"/>
+            <a:ext cx="3291120" cy="1325160"/>
           </a:xfrm>
           <a:prstGeom prst="roundRect">
             <a:avLst>
@@ -7556,6 +7710,13 @@
               <a:srgbClr val="e8eff7"/>
             </a:solidFill>
           </a:ln>
+          <a:effectLst>
+            <a:outerShdw blurRad="39960" dir="5400000" dist="23040" rotWithShape="0">
+              <a:srgbClr val="000000">
+                <a:alpha val="35000"/>
+              </a:srgbClr>
+            </a:outerShdw>
+          </a:effectLst>
         </p:spPr>
         <p:style>
           <a:lnRef idx="1">
@@ -7572,14 +7733,14 @@
       </p:sp>
       <p:sp>
         <p:nvSpPr>
-          <p:cNvPr id="129" name="TextBox 7"/>
+          <p:cNvPr id="128" name="TextBox 7"/>
           <p:cNvSpPr/>
           <p:nvPr/>
         </p:nvSpPr>
         <p:spPr>
           <a:xfrm>
             <a:off x="859680" y="1225440"/>
-            <a:ext cx="3035520" cy="903600"/>
+            <a:ext cx="3035160" cy="903600"/>
           </a:xfrm>
           <a:prstGeom prst="rect">
             <a:avLst/>
@@ -7612,6 +7773,7 @@
                   <a:srgbClr val="0e3865"/>
                 </a:solidFill>
                 <a:latin typeface="Arial"/>
+                <a:ea typeface="DejaVu Sans"/>
               </a:rPr>
               <a:t>Целевая переменная</a:t>
             </a:r>
@@ -7635,6 +7797,7 @@
                   <a:srgbClr val="1f2937"/>
                 </a:solidFill>
                 <a:latin typeface="Arial"/>
+                <a:ea typeface="DejaVu Sans"/>
               </a:rPr>
               <a:t>Готовность рекомендовать чаще используемый сервис другим студентам (шкала от 1 до 10).</a:t>
             </a:r>
@@ -7646,14 +7809,14 @@
       </p:sp>
       <p:sp>
         <p:nvSpPr>
-          <p:cNvPr id="130" name="Rounded Rectangle 8"/>
+          <p:cNvPr id="129" name="Rounded Rectangle 8"/>
           <p:cNvSpPr/>
           <p:nvPr/>
         </p:nvSpPr>
         <p:spPr>
           <a:xfrm>
             <a:off x="4187880" y="1115640"/>
-            <a:ext cx="3291480" cy="1325520"/>
+            <a:ext cx="3291120" cy="1325160"/>
           </a:xfrm>
           <a:prstGeom prst="roundRect">
             <a:avLst>
@@ -7668,6 +7831,13 @@
               <a:srgbClr val="e8eff7"/>
             </a:solidFill>
           </a:ln>
+          <a:effectLst>
+            <a:outerShdw blurRad="39960" dir="5400000" dist="23040" rotWithShape="0">
+              <a:srgbClr val="000000">
+                <a:alpha val="35000"/>
+              </a:srgbClr>
+            </a:outerShdw>
+          </a:effectLst>
         </p:spPr>
         <p:style>
           <a:lnRef idx="1">
@@ -7684,14 +7854,14 @@
       </p:sp>
       <p:sp>
         <p:nvSpPr>
-          <p:cNvPr id="131" name="TextBox 9"/>
+          <p:cNvPr id="130" name="TextBox 9"/>
           <p:cNvSpPr/>
           <p:nvPr/>
         </p:nvSpPr>
         <p:spPr>
           <a:xfrm>
             <a:off x="4316040" y="1225440"/>
-            <a:ext cx="3035520" cy="1087920"/>
+            <a:ext cx="3035160" cy="1087920"/>
           </a:xfrm>
           <a:prstGeom prst="rect">
             <a:avLst/>
@@ -7724,6 +7894,7 @@
                   <a:srgbClr val="0e3865"/>
                 </a:solidFill>
                 <a:latin typeface="Arial"/>
+                <a:ea typeface="DejaVu Sans"/>
               </a:rPr>
               <a:t>Откуда данные</a:t>
             </a:r>
@@ -7747,6 +7918,7 @@
                   <a:srgbClr val="1f2937"/>
                 </a:solidFill>
                 <a:latin typeface="Arial"/>
+                <a:ea typeface="DejaVu Sans"/>
               </a:rPr>
               <a:t>Признаки берутся из объединённой таблицы ответов: оценка сервиса, частота заказов, расходы, сравнение цен и важность критериев выбора.</a:t>
             </a:r>
@@ -7758,14 +7930,14 @@
       </p:sp>
       <p:sp>
         <p:nvSpPr>
-          <p:cNvPr id="132" name="Rounded Rectangle 10"/>
+          <p:cNvPr id="131" name="Rounded Rectangle 10"/>
           <p:cNvSpPr/>
           <p:nvPr/>
         </p:nvSpPr>
         <p:spPr>
           <a:xfrm>
             <a:off x="7644240" y="1115640"/>
-            <a:ext cx="3291480" cy="1325520"/>
+            <a:ext cx="3291120" cy="1325160"/>
           </a:xfrm>
           <a:prstGeom prst="roundRect">
             <a:avLst>
@@ -7780,6 +7952,13 @@
               <a:srgbClr val="e8eff7"/>
             </a:solidFill>
           </a:ln>
+          <a:effectLst>
+            <a:outerShdw blurRad="39960" dir="5400000" dist="23040" rotWithShape="0">
+              <a:srgbClr val="000000">
+                <a:alpha val="35000"/>
+              </a:srgbClr>
+            </a:outerShdw>
+          </a:effectLst>
         </p:spPr>
         <p:style>
           <a:lnRef idx="1">
@@ -7796,14 +7975,14 @@
       </p:sp>
       <p:sp>
         <p:nvSpPr>
-          <p:cNvPr id="133" name="TextBox 11"/>
+          <p:cNvPr id="132" name="TextBox 11"/>
           <p:cNvSpPr/>
           <p:nvPr/>
         </p:nvSpPr>
         <p:spPr>
           <a:xfrm>
             <a:off x="7772400" y="1225440"/>
-            <a:ext cx="3035520" cy="1087920"/>
+            <a:ext cx="3035160" cy="1087920"/>
           </a:xfrm>
           <a:prstGeom prst="rect">
             <a:avLst/>
@@ -7836,6 +8015,7 @@
                   <a:srgbClr val="0e3865"/>
                 </a:solidFill>
                 <a:latin typeface="Arial"/>
+                <a:ea typeface="DejaVu Sans"/>
               </a:rPr>
               <a:t>Как проверяли</a:t>
             </a:r>
@@ -7859,6 +8039,7 @@
                   <a:srgbClr val="1f2937"/>
                 </a:solidFill>
                 <a:latin typeface="Arial"/>
+                <a:ea typeface="DejaVu Sans"/>
               </a:rPr>
               <a:t>OLS-оценивание; анализ R², F-статистики, t-статистик, p-value и графика фактических и предсказанных значений.</a:t>
             </a:r>
@@ -7870,14 +8051,14 @@
       </p:sp>
       <p:sp>
         <p:nvSpPr>
-          <p:cNvPr id="134" name="TextBox 13"/>
+          <p:cNvPr id="133" name="TextBox 13"/>
           <p:cNvSpPr/>
           <p:nvPr/>
         </p:nvSpPr>
         <p:spPr>
           <a:xfrm>
             <a:off x="5897880" y="2907720"/>
-            <a:ext cx="4754520" cy="363960"/>
+            <a:ext cx="4754160" cy="363960"/>
           </a:xfrm>
           <a:prstGeom prst="rect">
             <a:avLst/>
@@ -7910,6 +8091,7 @@
                   <a:srgbClr val="0e3865"/>
                 </a:solidFill>
                 <a:latin typeface="Arial"/>
+                <a:ea typeface="DejaVu Sans"/>
               </a:rPr>
               <a:t>Почему график важен</a:t>
             </a:r>
@@ -7921,14 +8103,14 @@
       </p:sp>
       <p:sp>
         <p:nvSpPr>
-          <p:cNvPr id="135" name="TextBox 14"/>
+          <p:cNvPr id="134" name="TextBox 14"/>
           <p:cNvSpPr/>
           <p:nvPr/>
         </p:nvSpPr>
         <p:spPr>
           <a:xfrm>
             <a:off x="5897880" y="3328560"/>
-            <a:ext cx="4891680" cy="906120"/>
+            <a:ext cx="4891320" cy="906120"/>
           </a:xfrm>
           <a:prstGeom prst="rect">
             <a:avLst/>
@@ -7961,6 +8143,7 @@
                   <a:srgbClr val="242834"/>
                 </a:solidFill>
                 <a:latin typeface="Arial"/>
+                <a:ea typeface="DejaVu Sans"/>
               </a:rPr>
               <a:t>Чем ближе точки к диагонали, тем лучше модель описывает данные. Здесь модель улавливает общий уровень, но остаётся объяснительной, а не прогнозной.</a:t>
             </a:r>
@@ -7981,6 +8164,7 @@
                   <a:srgbClr val="242834"/>
                 </a:solidFill>
                 <a:latin typeface="Arial"/>
+                <a:ea typeface="DejaVu Sans"/>
               </a:rPr>
               <a:t>R² = 0,636; RMSE = 1,18; MAE = 0,92.</a:t>
             </a:r>
@@ -7992,7 +8176,7 @@
       </p:sp>
       <p:pic>
         <p:nvPicPr>
-          <p:cNvPr id="136" name="Picture 15" descr="regression_actual_vs_predicted_annotated.png"/>
+          <p:cNvPr id="135" name="Picture 15" descr="regression_actual_vs_predicted_annotated.png"/>
           <p:cNvPicPr/>
           <p:nvPr/>
         </p:nvPicPr>
@@ -8003,7 +8187,7 @@
         <p:spPr>
           <a:xfrm>
             <a:off x="1143000" y="2743200"/>
-            <a:ext cx="4077720" cy="2880000"/>
+            <a:ext cx="4077360" cy="2879640"/>
           </a:xfrm>
           <a:prstGeom prst="rect">
             <a:avLst/>
@@ -8045,14 +8229,14 @@
       </p:grpSpPr>
       <p:sp>
         <p:nvSpPr>
-          <p:cNvPr id="137" name="Rectangle 1"/>
+          <p:cNvPr id="136" name="Rectangle 1"/>
           <p:cNvSpPr/>
           <p:nvPr/>
         </p:nvSpPr>
         <p:spPr>
           <a:xfrm>
             <a:off x="0" y="0"/>
-            <a:ext cx="12191760" cy="6857640"/>
+            <a:ext cx="12191400" cy="6857280"/>
           </a:xfrm>
           <a:prstGeom prst="rect">
             <a:avLst/>
@@ -8063,6 +8247,13 @@
           <a:ln>
             <a:noFill/>
           </a:ln>
+          <a:effectLst>
+            <a:outerShdw blurRad="39960" dir="5400000" dist="23040" rotWithShape="0">
+              <a:srgbClr val="000000">
+                <a:alpha val="35000"/>
+              </a:srgbClr>
+            </a:outerShdw>
+          </a:effectLst>
         </p:spPr>
         <p:style>
           <a:lnRef idx="1">
@@ -8079,14 +8270,14 @@
       </p:sp>
       <p:sp>
         <p:nvSpPr>
-          <p:cNvPr id="138" name="Rectangle 2"/>
+          <p:cNvPr id="137" name="Rectangle 2"/>
           <p:cNvSpPr/>
           <p:nvPr/>
         </p:nvSpPr>
         <p:spPr>
           <a:xfrm>
             <a:off x="0" y="0"/>
-            <a:ext cx="12191760" cy="109440"/>
+            <a:ext cx="12191400" cy="109080"/>
           </a:xfrm>
           <a:prstGeom prst="rect">
             <a:avLst/>
@@ -8097,6 +8288,13 @@
           <a:ln>
             <a:noFill/>
           </a:ln>
+          <a:effectLst>
+            <a:outerShdw blurRad="39960" dir="5400000" dist="23040" rotWithShape="0">
+              <a:srgbClr val="000000">
+                <a:alpha val="35000"/>
+              </a:srgbClr>
+            </a:outerShdw>
+          </a:effectLst>
         </p:spPr>
         <p:style>
           <a:lnRef idx="1">
@@ -8113,14 +8311,14 @@
       </p:sp>
       <p:sp>
         <p:nvSpPr>
-          <p:cNvPr id="139" name="TextBox 3"/>
+          <p:cNvPr id="138" name="TextBox 3"/>
           <p:cNvSpPr/>
           <p:nvPr/>
         </p:nvSpPr>
         <p:spPr>
           <a:xfrm>
             <a:off x="411480" y="210240"/>
-            <a:ext cx="594000" cy="272160"/>
+            <a:ext cx="593640" cy="272160"/>
           </a:xfrm>
           <a:prstGeom prst="rect">
             <a:avLst/>
@@ -8153,6 +8351,7 @@
                   <a:srgbClr val="f28e2b"/>
                 </a:solidFill>
                 <a:latin typeface="Arial"/>
+                <a:ea typeface="DejaVu Sans"/>
               </a:rPr>
               <a:t>09</a:t>
             </a:r>
@@ -8164,14 +8363,14 @@
       </p:sp>
       <p:sp>
         <p:nvSpPr>
-          <p:cNvPr id="140" name="TextBox 4"/>
+          <p:cNvPr id="139" name="TextBox 4"/>
           <p:cNvSpPr/>
           <p:nvPr/>
         </p:nvSpPr>
         <p:spPr>
           <a:xfrm>
             <a:off x="841320" y="182880"/>
-            <a:ext cx="8960760" cy="455400"/>
+            <a:ext cx="8960400" cy="455400"/>
           </a:xfrm>
           <a:prstGeom prst="rect">
             <a:avLst/>
@@ -8204,6 +8403,7 @@
                   <a:srgbClr val="0e3865"/>
                 </a:solidFill>
                 <a:latin typeface="Arial"/>
+                <a:ea typeface="DejaVu Sans"/>
               </a:rPr>
               <a:t>Регрессионная модель: интерпретация коэффициентов</a:t>
             </a:r>
@@ -8215,14 +8415,14 @@
       </p:sp>
       <p:sp>
         <p:nvSpPr>
-          <p:cNvPr id="141" name="TextBox 5"/>
+          <p:cNvPr id="140" name="TextBox 5"/>
           <p:cNvSpPr/>
           <p:nvPr/>
         </p:nvSpPr>
         <p:spPr>
           <a:xfrm>
             <a:off x="859680" y="576000"/>
-            <a:ext cx="10149480" cy="266040"/>
+            <a:ext cx="10149120" cy="266040"/>
           </a:xfrm>
           <a:prstGeom prst="rect">
             <a:avLst/>
@@ -8255,6 +8455,7 @@
                   <a:srgbClr val="606b7b"/>
                 </a:solidFill>
                 <a:latin typeface="Arial"/>
+                <a:ea typeface="DejaVu Sans"/>
               </a:rPr>
               <a:t>Смотрим, какие факторы действительно связаны с готовностью рекомендовать сервис</a:t>
             </a:r>
@@ -8266,14 +8467,14 @@
       </p:sp>
       <p:sp>
         <p:nvSpPr>
-          <p:cNvPr id="142" name="TextBox 7"/>
+          <p:cNvPr id="141" name="TextBox 7"/>
           <p:cNvSpPr/>
           <p:nvPr/>
         </p:nvSpPr>
         <p:spPr>
           <a:xfrm>
             <a:off x="8183880" y="1234440"/>
-            <a:ext cx="2697120" cy="363960"/>
+            <a:ext cx="2696760" cy="363960"/>
           </a:xfrm>
           <a:prstGeom prst="rect">
             <a:avLst/>
@@ -8306,6 +8507,7 @@
                   <a:srgbClr val="0e3865"/>
                 </a:solidFill>
                 <a:latin typeface="Arial"/>
+                <a:ea typeface="DejaVu Sans"/>
               </a:rPr>
               <a:t>Значимые факторы</a:t>
             </a:r>
@@ -8317,14 +8519,14 @@
       </p:sp>
       <p:sp>
         <p:nvSpPr>
-          <p:cNvPr id="143" name="TextBox 8"/>
+          <p:cNvPr id="142" name="TextBox 8"/>
           <p:cNvSpPr/>
           <p:nvPr/>
         </p:nvSpPr>
         <p:spPr>
           <a:xfrm>
             <a:off x="8211240" y="1673280"/>
-            <a:ext cx="2834280" cy="1540440"/>
+            <a:ext cx="2833920" cy="1540440"/>
           </a:xfrm>
           <a:prstGeom prst="rect">
             <a:avLst/>
@@ -8360,6 +8562,7 @@
                   <a:srgbClr val="1f2937"/>
                 </a:solidFill>
                 <a:latin typeface="Arial"/>
+                <a:ea typeface="DejaVu Sans"/>
               </a:rPr>
               <a:t>расходы на доставку: положительная связь;</a:t>
             </a:r>
@@ -8383,6 +8586,7 @@
                   <a:srgbClr val="1f2937"/>
                 </a:solidFill>
                 <a:latin typeface="Arial"/>
+                <a:ea typeface="DejaVu Sans"/>
               </a:rPr>
               <a:t>сравнение цен: положительная связь;</a:t>
             </a:r>
@@ -8406,6 +8610,7 @@
                   <a:srgbClr val="1f2937"/>
                 </a:solidFill>
                 <a:latin typeface="Arial"/>
+                <a:ea typeface="DejaVu Sans"/>
               </a:rPr>
               <a:t>важность цены: отрицательная связь.</a:t>
             </a:r>
@@ -8417,14 +8622,14 @@
       </p:sp>
       <p:sp>
         <p:nvSpPr>
-          <p:cNvPr id="144" name="Rounded Rectangle 9"/>
+          <p:cNvPr id="143" name="Rounded Rectangle 9"/>
           <p:cNvSpPr/>
           <p:nvPr/>
         </p:nvSpPr>
         <p:spPr>
           <a:xfrm>
             <a:off x="7899840" y="4443840"/>
-            <a:ext cx="3299760" cy="1499760"/>
+            <a:ext cx="3299400" cy="1499400"/>
           </a:xfrm>
           <a:prstGeom prst="roundRect">
             <a:avLst>
@@ -8439,6 +8644,13 @@
               <a:srgbClr val="e8eff7"/>
             </a:solidFill>
           </a:ln>
+          <a:effectLst>
+            <a:outerShdw blurRad="39960" dir="5400000" dist="23040" rotWithShape="0">
+              <a:srgbClr val="000000">
+                <a:alpha val="35000"/>
+              </a:srgbClr>
+            </a:outerShdw>
+          </a:effectLst>
         </p:spPr>
         <p:style>
           <a:lnRef idx="1">
@@ -8455,14 +8667,14 @@
       </p:sp>
       <p:sp>
         <p:nvSpPr>
-          <p:cNvPr id="145" name="TextBox 10"/>
+          <p:cNvPr id="144" name="TextBox 10"/>
           <p:cNvSpPr/>
           <p:nvPr/>
         </p:nvSpPr>
         <p:spPr>
           <a:xfrm>
             <a:off x="8001000" y="4443840"/>
-            <a:ext cx="2979720" cy="1353960"/>
+            <a:ext cx="2979360" cy="1353960"/>
           </a:xfrm>
           <a:prstGeom prst="rect">
             <a:avLst/>
@@ -8495,6 +8707,7 @@
                   <a:srgbClr val="242834"/>
                 </a:solidFill>
                 <a:latin typeface="Arial"/>
+                <a:ea typeface="DejaVu Sans"/>
               </a:rPr>
               <a:t>Итог</a:t>
             </a:r>
@@ -8515,6 +8728,7 @@
                   <a:srgbClr val="242834"/>
                 </a:solidFill>
                 <a:latin typeface="Arial"/>
+                <a:ea typeface="DejaVu Sans"/>
               </a:rPr>
               <a:t>Чем выше расходы и чаще сравнение цен, тем выше готовность рекомендовать.</a:t>
             </a:r>
@@ -8535,6 +8749,7 @@
                   <a:srgbClr val="242834"/>
                 </a:solidFill>
                 <a:latin typeface="Arial"/>
+                <a:ea typeface="DejaVu Sans"/>
               </a:rPr>
               <a:t>Высокая чувствительность к цене снижает лояльность.</a:t>
             </a:r>
@@ -8546,7 +8761,7 @@
       </p:sp>
       <p:pic>
         <p:nvPicPr>
-          <p:cNvPr id="146" name="Picture 11" descr="regression_coefficients_ci.png"/>
+          <p:cNvPr id="145" name="Picture 11" descr="regression_coefficients_ci.png"/>
           <p:cNvPicPr/>
           <p:nvPr/>
         </p:nvPicPr>
@@ -8557,7 +8772,7 @@
         <p:spPr>
           <a:xfrm>
             <a:off x="658440" y="1270440"/>
-            <a:ext cx="7269120" cy="4536720"/>
+            <a:ext cx="7268760" cy="4536360"/>
           </a:xfrm>
           <a:prstGeom prst="rect">
             <a:avLst/>
